--- a/발표/20260805_밭보다_본선발표_v5.pptx
+++ b/발표/20260805_밭보다_본선발표_v5.pptx
@@ -4,6 +4,9 @@
   <p:sldMasterIdLst>
     <p:sldMasterId id="2147483648" r:id="rId1"/>
   </p:sldMasterIdLst>
+  <p:notesMasterIdLst>
+    <p:notesMasterId r:id="rId11"/>
+  </p:notesMasterIdLst>
   <p:sldIdLst>
     <p:sldId id="256" r:id="rId2"/>
     <p:sldId id="257" r:id="rId3"/>
@@ -15,9 +18,6 @@
     <p:sldId id="263" r:id="rId9"/>
     <p:sldId id="264" r:id="rId10"/>
   </p:sldIdLst>
-  <p:notesMasterIdLst>
-    <p:notesMasterId r:id="rId11"/>
-  </p:notesMasterIdLst>
   <p:sldSz cx="12192000" cy="6858000"/>
   <p:notesSz cx="6858000" cy="12192000"/>
   <p:defaultTextStyle>
@@ -112,6 +112,11 @@
       </a:defRPr>
     </a:lvl9pPr>
   </p:defaultTextStyle>
+  <p:extLst>
+    <p:ext uri="{EFAFB233-063F-42B5-8137-9DF3F51BA10A}">
+      <p15:sldGuideLst xmlns:p15="http://schemas.microsoft.com/office/powerpoint/2012/main"/>
+    </p:ext>
+  </p:extLst>
 </p:presentation>
 </file>
 
@@ -137,240 +142,16 @@
           <a:chExt cx="0" cy="0"/>
         </a:xfrm>
       </p:grpSpPr>
-      <p:sp>
-        <p:nvSpPr>
-          <p:cNvPr id="2" name="Header Placeholder 1"/>
-          <p:cNvSpPr>
-            <a:spLocks noGrp="1"/>
-          </p:cNvSpPr>
-          <p:nvPr>
-            <p:ph type="hdr" sz="quarter"/>
-          </p:nvPr>
-        </p:nvSpPr>
-        <p:spPr>
-          <a:xfrm>
-            <a:off x="0" y="0"/>
-            <a:ext cx="2971800" cy="458788"/>
-          </a:xfrm>
-          <a:prstGeom prst="rect">
-            <a:avLst/>
-          </a:prstGeom>
-        </p:spPr>
-        <p:txBody>
-          <a:bodyPr vert="horz" lIns="91440" tIns="45720" rIns="91440" bIns="45720" rtlCol="0"/>
-          <a:lstStyle>
-            <a:lvl1pPr algn="l">
-              <a:defRPr sz="1200"/>
-            </a:lvl1pPr>
-          </a:lstStyle>
-          <a:p>
-            <a:endParaRPr lang="en-US"/>
-          </a:p>
-        </p:txBody>
-      </p:sp>
-      <p:sp>
-        <p:nvSpPr>
-          <p:cNvPr id="3" name="Date Placeholder 2"/>
-          <p:cNvSpPr>
-            <a:spLocks noGrp="1"/>
-          </p:cNvSpPr>
-          <p:nvPr>
-            <p:ph type="dt" idx="1"/>
-          </p:nvPr>
-        </p:nvSpPr>
-        <p:spPr>
-          <a:xfrm>
-            <a:off x="3884613" y="0"/>
-            <a:ext cx="2971800" cy="458788"/>
-          </a:xfrm>
-          <a:prstGeom prst="rect">
-            <a:avLst/>
-          </a:prstGeom>
-        </p:spPr>
-        <p:txBody>
-          <a:bodyPr vert="horz" lIns="91440" tIns="45720" rIns="91440" bIns="45720" rtlCol="0"/>
-          <a:lstStyle>
-            <a:lvl1pPr algn="r">
-              <a:defRPr sz="1200"/>
-            </a:lvl1pPr>
-          </a:lstStyle>
-          <a:p>
-            <a:fld id="{5282F153-3F37-0F45-9E97-73ACFA13230C}" type="datetimeFigureOut">
-              <a:rPr lang="en-US"/>
-              <a:t>7/23/19</a:t>
-            </a:fld>
-            <a:endParaRPr lang="en-US"/>
-          </a:p>
-        </p:txBody>
-      </p:sp>
-      <p:sp>
-        <p:nvSpPr>
-          <p:cNvPr id="4" name="Slide Image Placeholder 3"/>
-          <p:cNvSpPr>
-            <a:spLocks noGrp="1" noRot="1" noChangeAspect="1"/>
-          </p:cNvSpPr>
-          <p:nvPr>
-            <p:ph type="sldImg" idx="2"/>
-          </p:nvPr>
-        </p:nvSpPr>
-        <p:spPr>
-          <a:xfrm>
-            <a:off x="685800" y="1143000"/>
-            <a:ext cx="5486400" cy="3086100"/>
-          </a:xfrm>
-          <a:prstGeom prst="rect">
-            <a:avLst/>
-          </a:prstGeom>
-          <a:noFill/>
-          <a:ln w="12700">
-            <a:solidFill>
-              <a:prstClr val="black"/>
-            </a:solidFill>
-          </a:ln>
-        </p:spPr>
-        <p:txBody>
-          <a:bodyPr vert="horz" lIns="91440" tIns="45720" rIns="91440" bIns="45720" rtlCol="0" anchor="ctr"/>
-          <a:lstStyle/>
-          <a:p>
-            <a:endParaRPr lang="en-US"/>
-          </a:p>
-        </p:txBody>
-      </p:sp>
-      <p:sp>
-        <p:nvSpPr>
-          <p:cNvPr id="5" name="Notes Placeholder 4"/>
-          <p:cNvSpPr>
-            <a:spLocks noGrp="1"/>
-          </p:cNvSpPr>
-          <p:nvPr>
-            <p:ph type="body" sz="quarter" idx="3"/>
-          </p:nvPr>
-        </p:nvSpPr>
-        <p:spPr>
-          <a:xfrm>
-            <a:off x="685800" y="4400550"/>
-            <a:ext cx="5486400" cy="3600450"/>
-          </a:xfrm>
-          <a:prstGeom prst="rect">
-            <a:avLst/>
-          </a:prstGeom>
-        </p:spPr>
-        <p:txBody>
-          <a:bodyPr vert="horz" lIns="91440" tIns="45720" rIns="91440" bIns="45720" rtlCol="0"/>
-          <a:lstStyle/>
-          <a:p>
-            <a:pPr lvl="0"/>
-            <a:r>
-              <a:rPr lang="en-US"/>
-              <a:t>Click to edit Master text styles</a:t>
-            </a:r>
-          </a:p>
-          <a:p>
-            <a:pPr lvl="1"/>
-            <a:r>
-              <a:rPr lang="en-US"/>
-              <a:t>Second level</a:t>
-            </a:r>
-          </a:p>
-          <a:p>
-            <a:pPr lvl="2"/>
-            <a:r>
-              <a:rPr lang="en-US"/>
-              <a:t>Third level</a:t>
-            </a:r>
-          </a:p>
-          <a:p>
-            <a:pPr lvl="3"/>
-            <a:r>
-              <a:rPr lang="en-US"/>
-              <a:t>Fourth level</a:t>
-            </a:r>
-          </a:p>
-          <a:p>
-            <a:pPr lvl="4"/>
-            <a:r>
-              <a:rPr lang="en-US"/>
-              <a:t>Fifth level</a:t>
-            </a:r>
-          </a:p>
-        </p:txBody>
-      </p:sp>
-      <p:sp>
-        <p:nvSpPr>
-          <p:cNvPr id="6" name="Footer Placeholder 5"/>
-          <p:cNvSpPr>
-            <a:spLocks noGrp="1"/>
-          </p:cNvSpPr>
-          <p:nvPr>
-            <p:ph type="ftr" sz="quarter" idx="4"/>
-          </p:nvPr>
-        </p:nvSpPr>
-        <p:spPr>
-          <a:xfrm>
-            <a:off x="0" y="8685213"/>
-            <a:ext cx="2971800" cy="458787"/>
-          </a:xfrm>
-          <a:prstGeom prst="rect">
-            <a:avLst/>
-          </a:prstGeom>
-        </p:spPr>
-        <p:txBody>
-          <a:bodyPr vert="horz" lIns="91440" tIns="45720" rIns="91440" bIns="45720" rtlCol="0" anchor="b"/>
-          <a:lstStyle>
-            <a:lvl1pPr algn="l">
-              <a:defRPr sz="1200"/>
-            </a:lvl1pPr>
-          </a:lstStyle>
-          <a:p>
-            <a:endParaRPr lang="en-US"/>
-          </a:p>
-        </p:txBody>
-      </p:sp>
-      <p:sp>
-        <p:nvSpPr>
-          <p:cNvPr id="7" name="Slide Number Placeholder 6"/>
-          <p:cNvSpPr>
-            <a:spLocks noGrp="1"/>
-          </p:cNvSpPr>
-          <p:nvPr>
-            <p:ph type="sldNum" sz="quarter" idx="5"/>
-          </p:nvPr>
-        </p:nvSpPr>
-        <p:spPr>
-          <a:xfrm>
-            <a:off x="3884613" y="8685213"/>
-            <a:ext cx="2971800" cy="458787"/>
-          </a:xfrm>
-          <a:prstGeom prst="rect">
-            <a:avLst/>
-          </a:prstGeom>
-        </p:spPr>
-        <p:txBody>
-          <a:bodyPr vert="horz" lIns="91440" tIns="45720" rIns="91440" bIns="45720" rtlCol="0" anchor="b"/>
-          <a:lstStyle>
-            <a:lvl1pPr algn="r">
-              <a:defRPr sz="1200"/>
-            </a:lvl1pPr>
-          </a:lstStyle>
-          <a:p>
-            <a:fld id="{CE5E9CC1-C706-0F49-92D6-E571CC5EEA8F}" type="slidenum">
-              <a:rPr lang="en-US"/>
-              <a:t>‹#›</a:t>
-            </a:fld>
-            <a:endParaRPr lang="en-US"/>
-          </a:p>
-        </p:txBody>
-      </p:sp>
     </p:spTree>
     <p:extLst>
       <p:ext uri="{BB962C8B-B14F-4D97-AF65-F5344CB8AC3E}">
-        <p14:creationId xmlns:p14="http://schemas.microsoft.com/office/powerpoint/2010/main" val="1024086991"/>
+        <p14:creationId xmlns:p14="http://schemas.microsoft.com/office/powerpoint/2010/main" val="1440580631"/>
       </p:ext>
     </p:extLst>
   </p:cSld>
   <p:clrMap bg1="lt1" tx1="dk1" bg2="lt2" tx2="dk2" accent1="accent1" accent2="accent2" accent3="accent3" accent4="accent4" accent5="accent5" accent6="accent6" hlink="hlink" folHlink="folHlink"/>
   <p:notesStyle>
-    <a:lvl1pPr marL="0" algn="l" defTabSz="914400" rtl="0" eaLnBrk="1" latinLnBrk="0" hangingPunct="1">
+    <a:lvl1pPr marL="0" algn="l" defTabSz="914400" rtl="0" eaLnBrk="1" latinLnBrk="1" hangingPunct="1">
       <a:defRPr sz="1200" kern="1200">
         <a:solidFill>
           <a:schemeClr val="tx1"/>
@@ -380,7 +161,7 @@
         <a:cs typeface="+mn-cs"/>
       </a:defRPr>
     </a:lvl1pPr>
-    <a:lvl2pPr marL="457200" algn="l" defTabSz="914400" rtl="0" eaLnBrk="1" latinLnBrk="0" hangingPunct="1">
+    <a:lvl2pPr marL="457200" algn="l" defTabSz="914400" rtl="0" eaLnBrk="1" latinLnBrk="1" hangingPunct="1">
       <a:defRPr sz="1200" kern="1200">
         <a:solidFill>
           <a:schemeClr val="tx1"/>
@@ -390,7 +171,7 @@
         <a:cs typeface="+mn-cs"/>
       </a:defRPr>
     </a:lvl2pPr>
-    <a:lvl3pPr marL="914400" algn="l" defTabSz="914400" rtl="0" eaLnBrk="1" latinLnBrk="0" hangingPunct="1">
+    <a:lvl3pPr marL="914400" algn="l" defTabSz="914400" rtl="0" eaLnBrk="1" latinLnBrk="1" hangingPunct="1">
       <a:defRPr sz="1200" kern="1200">
         <a:solidFill>
           <a:schemeClr val="tx1"/>
@@ -400,7 +181,7 @@
         <a:cs typeface="+mn-cs"/>
       </a:defRPr>
     </a:lvl3pPr>
-    <a:lvl4pPr marL="1371600" algn="l" defTabSz="914400" rtl="0" eaLnBrk="1" latinLnBrk="0" hangingPunct="1">
+    <a:lvl4pPr marL="1371600" algn="l" defTabSz="914400" rtl="0" eaLnBrk="1" latinLnBrk="1" hangingPunct="1">
       <a:defRPr sz="1200" kern="1200">
         <a:solidFill>
           <a:schemeClr val="tx1"/>
@@ -410,7 +191,7 @@
         <a:cs typeface="+mn-cs"/>
       </a:defRPr>
     </a:lvl4pPr>
-    <a:lvl5pPr marL="1828800" algn="l" defTabSz="914400" rtl="0" eaLnBrk="1" latinLnBrk="0" hangingPunct="1">
+    <a:lvl5pPr marL="1828800" algn="l" defTabSz="914400" rtl="0" eaLnBrk="1" latinLnBrk="1" hangingPunct="1">
       <a:defRPr sz="1200" kern="1200">
         <a:solidFill>
           <a:schemeClr val="tx1"/>
@@ -420,7 +201,7 @@
         <a:cs typeface="+mn-cs"/>
       </a:defRPr>
     </a:lvl5pPr>
-    <a:lvl6pPr marL="2286000" algn="l" defTabSz="914400" rtl="0" eaLnBrk="1" latinLnBrk="0" hangingPunct="1">
+    <a:lvl6pPr marL="2286000" algn="l" defTabSz="914400" rtl="0" eaLnBrk="1" latinLnBrk="1" hangingPunct="1">
       <a:defRPr sz="1200" kern="1200">
         <a:solidFill>
           <a:schemeClr val="tx1"/>
@@ -430,7 +211,7 @@
         <a:cs typeface="+mn-cs"/>
       </a:defRPr>
     </a:lvl6pPr>
-    <a:lvl7pPr marL="2743200" algn="l" defTabSz="914400" rtl="0" eaLnBrk="1" latinLnBrk="0" hangingPunct="1">
+    <a:lvl7pPr marL="2743200" algn="l" defTabSz="914400" rtl="0" eaLnBrk="1" latinLnBrk="1" hangingPunct="1">
       <a:defRPr sz="1200" kern="1200">
         <a:solidFill>
           <a:schemeClr val="tx1"/>
@@ -440,7 +221,7 @@
         <a:cs typeface="+mn-cs"/>
       </a:defRPr>
     </a:lvl7pPr>
-    <a:lvl8pPr marL="3200400" algn="l" defTabSz="914400" rtl="0" eaLnBrk="1" latinLnBrk="0" hangingPunct="1">
+    <a:lvl8pPr marL="3200400" algn="l" defTabSz="914400" rtl="0" eaLnBrk="1" latinLnBrk="1" hangingPunct="1">
       <a:defRPr sz="1200" kern="1200">
         <a:solidFill>
           <a:schemeClr val="tx1"/>
@@ -450,7 +231,7 @@
         <a:cs typeface="+mn-cs"/>
       </a:defRPr>
     </a:lvl8pPr>
-    <a:lvl9pPr marL="3657600" algn="l" defTabSz="914400" rtl="0" eaLnBrk="1" latinLnBrk="0" hangingPunct="1">
+    <a:lvl9pPr marL="3657600" algn="l" defTabSz="914400" rtl="0" eaLnBrk="1" latinLnBrk="1" hangingPunct="1">
       <a:defRPr sz="1200" kern="1200">
         <a:solidFill>
           <a:schemeClr val="tx1"/>
@@ -516,7 +297,6 @@
 팀 소개는 한 문장으로 끝낸다.
 금지 — 팀 소개 길게, 귀농 인구·실패율 통계, 필드 코드명, 등급 전수 표, 이 항목을 한계로 언급, 다른 서비스는 밭 등급만 쓴다는 추정.</a:t>
             </a:r>
-            <a:endParaRPr lang="en-US" dirty="0"/>
           </a:p>
         </p:txBody>
       </p:sp>
@@ -607,7 +387,6 @@
 이 장이 비교 기준을 남기는 장이다. 발표 순서 1번이므로 심사위원이 뒤의 다섯 팀을 볼 때 쓸 낱말을 여기서 심는다.
 금지 — API 개수·아키텍처 도해, 「필지 단위 서비스는 밭보다뿐」, 기능 목록 나열.</a:t>
             </a:r>
-            <a:endParaRPr lang="en-US" dirty="0"/>
           </a:p>
         </p:txBody>
       </p:sp>
@@ -698,7 +477,6 @@
 표를 읽지 않는다. 네 칸을 가리키며 “넷이 서로 다른 기관, 서로 다른 시각입니다”까지만 말한다. 기관 넷을 일일이 읊으면 22초를 넘긴다.
 금지 — 「대부분의 서비스는 시·군 평균만 제공한다」, 기존 서비스 비교표, 다른 팀·기관 이름.</a:t>
             </a:r>
-            <a:endParaRPr lang="en-US" dirty="0"/>
           </a:p>
         </p:txBody>
       </p:sp>
@@ -796,7 +574,6 @@
 ■ 고정 전환 문장(그대로 말한다) — “지금은 저장된 검증 장면으로 이어가며, 서비스에서는 실시간과 검증 스냅샷, 시연 자료를 구분해 표시합니다.”
 ■ 실패 원인을 설명하지 않는다. 위 문장을 말하고 이 장의 다섯 조각을 순서대로 넘긴다.</a:t>
             </a:r>
-            <a:endParaRPr lang="en-US" dirty="0"/>
           </a:p>
         </p:txBody>
       </p:sp>
@@ -887,7 +664,6 @@
 회귀 테스트 수치는 당일 아침 재실행 결과로 말한다.
 금지 — 「AI가 모든 숫자 오류를 차단한다」, 프롬프트 전문 낭독, 모델 이름·버전 고정(화면 배지가 실제 모델을 표시한다), 560 시나리오를 정확도로 제시. 위험 라벨 변동(완화 60% · 보수 10%)은 질의응답에서만.</a:t>
             </a:r>
-            <a:endParaRPr lang="en-US" dirty="0"/>
           </a:p>
         </p:txBody>
       </p:sp>
@@ -977,7 +753,6 @@
 운영에서 중요한 것은 잘 될 때가 아니라 안 될 때입니다. 실패한 소스만 대체하고 이유를 남깁니다. 8월 3일에 인증이 실제로 막혔을 때 이 경로로 판정까지 이어지는 것을 확인했습니다. 가정이 아니라 겪은 일입니다.
 금지 — 운영비 0원·운영 인력 없음, 지역 확대 건수, 발표장에서 장애를 라이브로 재현, 401 화면을 조작해 만든 캡처.</a:t>
             </a:r>
-            <a:endParaRPr lang="en-US" dirty="0"/>
           </a:p>
         </p:txBody>
       </p:sp>
@@ -1067,7 +842,6 @@
 농지 계약 전, 작물을 바꿀 때, 파종 전에 다시 옵니다. 재방문율은 아직 측정하지 않았습니다. 유료 고객과 확정 가격도 없습니다. 귀농귀촌센터·농업기술센터·농협 상담 창구를 첫 실증 파트너로 제안하고, 반복 사용이 확인되면 기관용 연간 라이선스를 검토하겠습니다.
 「제안」과 「검토」를 반드시 말로도 붙인다. 금지 — 「센터가 매일 쓴다」, 기관 도입 확정, 시장 규모 수치, 라이선스 금액.</a:t>
             </a:r>
-            <a:endParaRPr lang="en-US" dirty="0"/>
           </a:p>
         </p:txBody>
       </p:sp>
@@ -1157,7 +931,6 @@
 세 가지만 말씀드립니다. 대관령 표본의 토양 산도 조회는 258필지 중 18건, 7.0%였고 없는 값을 다른 농지에서 채우지 않습니다. 예보는 3일이고, 관측소는 6.45km 떨어져 점수에 넣지 않습니다. 현장 정확도는 아직 없습니다. 그래서 참고 판정으로 한정합니다.
 7.0%는 반드시 분모와 함께 말한다. 금지 — 한계 네 개 이상 나열(나머지는 질의응답), 과수·논 등급 미반영, 중기예보 구현 주장.</a:t>
             </a:r>
-            <a:endParaRPr lang="en-US" dirty="0"/>
           </a:p>
         </p:txBody>
       </p:sp>
@@ -1248,7 +1021,6 @@
 금지 — 새 기능·수치·로드맵, 감사 인사 전용 장, 팀 사진, 연락처.
 여기서 멈추고 질의응답으로 넘어간다. 답변은 대본 v3 5절 28문.</a:t>
             </a:r>
-            <a:endParaRPr lang="en-US" dirty="0"/>
           </a:p>
         </p:txBody>
       </p:sp>
@@ -1321,6 +1093,11 @@
 <file path=ppt/slideMasters/slideMaster1.xml><?xml version="1.0" encoding="utf-8"?>
 <p:sldMaster xmlns:a="http://schemas.openxmlformats.org/drawingml/2006/main" xmlns:r="http://schemas.openxmlformats.org/officeDocument/2006/relationships" xmlns:p="http://schemas.openxmlformats.org/presentationml/2006/main">
   <p:cSld>
+    <p:bg>
+      <p:bgRef idx="1001">
+        <a:schemeClr val="bg1"/>
+      </p:bgRef>
+    </p:bg>
     <p:spTree>
       <p:nvGrpSpPr>
         <p:cNvPr id="1" name=""/>
@@ -1603,6 +1380,7 @@
         <a:solidFill>
           <a:srgbClr val="10262E"/>
         </a:solidFill>
+        <a:effectLst/>
       </p:bgPr>
     </p:bg>
     <p:spTree>
@@ -1640,11 +1418,11 @@
           <a:bodyPr wrap="square" lIns="0" tIns="0" rIns="0" bIns="0" rtlCol="0" anchor="ctr"/>
           <a:lstStyle/>
           <a:p>
-            <a:pPr indent="0" marL="0">
-              <a:buNone/>
-            </a:pPr>
-            <a:r>
-              <a:rPr lang="en-US" sz="1250" b="1" spc="100" kern="0" dirty="0">
+            <a:pPr marL="0" indent="0">
+              <a:buNone/>
+            </a:pPr>
+            <a:r>
+              <a:rPr lang="en-US" sz="1250" b="1" kern="0" spc="100" dirty="0">
                 <a:solidFill>
                   <a:srgbClr val="A7C0C8"/>
                 </a:solidFill>
@@ -1679,7 +1457,7 @@
           <a:bodyPr wrap="square" lIns="0" tIns="0" rIns="0" bIns="0" rtlCol="0" anchor="ctr"/>
           <a:lstStyle/>
           <a:p>
-            <a:pPr algn="r" indent="0" marL="0">
+            <a:pPr marL="0" indent="0" algn="r">
               <a:buNone/>
             </a:pPr>
             <a:r>
@@ -1718,7 +1496,7 @@
           <a:bodyPr wrap="square" lIns="0" tIns="0" rIns="0" bIns="0" rtlCol="0" anchor="t"/>
           <a:lstStyle/>
           <a:p>
-            <a:pPr indent="0" marL="0">
+            <a:pPr marL="0" indent="0">
               <a:lnSpc>
                 <a:spcPct val="118000"/>
               </a:lnSpc>
@@ -1738,7 +1516,7 @@
             <a:endParaRPr lang="en-US" sz="3100" dirty="0"/>
           </a:p>
           <a:p>
-            <a:pPr indent="0" marL="0">
+            <a:pPr marL="0" indent="0">
               <a:lnSpc>
                 <a:spcPct val="118000"/>
               </a:lnSpc>
@@ -1785,6 +1563,13 @@
             <a:prstDash val="solid"/>
           </a:ln>
         </p:spPr>
+        <p:txBody>
+          <a:bodyPr/>
+          <a:lstStyle/>
+          <a:p>
+            <a:endParaRPr lang="ko-KR" altLang="en-US"/>
+          </a:p>
+        </p:txBody>
       </p:sp>
       <p:sp>
         <p:nvSpPr>
@@ -1807,7 +1592,7 @@
           <a:bodyPr wrap="square" lIns="0" tIns="0" rIns="0" bIns="0" rtlCol="0" anchor="ctr"/>
           <a:lstStyle/>
           <a:p>
-            <a:pPr indent="0" marL="0">
+            <a:pPr marL="0" indent="0">
               <a:buNone/>
             </a:pPr>
             <a:r>
@@ -1846,7 +1631,7 @@
           <a:bodyPr wrap="square" lIns="0" tIns="0" rIns="0" bIns="0" rtlCol="0" anchor="ctr"/>
           <a:lstStyle/>
           <a:p>
-            <a:pPr algn="ctr" indent="0" marL="0">
+            <a:pPr marL="0" indent="0" algn="ctr">
               <a:buNone/>
             </a:pPr>
             <a:r>
@@ -1866,14 +1651,14 @@
       </p:sp>
       <p:pic>
         <p:nvPicPr>
-          <p:cNvPr id="8" name="Image 0" descr="D:/Projects/batboda/발표/캡처/20260805_C05_유방동870답_사과_과수등급.png">    </p:cNvPr>
+          <p:cNvPr id="8" name="Image 0" descr="D:/Projects/batboda/발표/캡처/20260805_C05_유방동870답_사과_과수등급.png"/>
           <p:cNvPicPr>
             <a:picLocks noChangeAspect="1"/>
           </p:cNvPicPr>
           <p:nvPr/>
         </p:nvPicPr>
         <p:blipFill>
-          <a:blip r:embed="rId1"/>
+          <a:blip r:embed="rId3"/>
           <a:stretch>
             <a:fillRect/>
           </a:stretch>
@@ -1909,7 +1694,7 @@
           <a:bodyPr wrap="square" lIns="0" tIns="0" rIns="0" bIns="0" rtlCol="0" anchor="ctr"/>
           <a:lstStyle/>
           <a:p>
-            <a:pPr algn="ctr" indent="0" marL="0">
+            <a:pPr marL="0" indent="0" algn="ctr">
               <a:buNone/>
             </a:pPr>
             <a:r>
@@ -1929,14 +1714,14 @@
       </p:sp>
       <p:pic>
         <p:nvPicPr>
-          <p:cNvPr id="10" name="Image 1" descr="D:/Projects/batboda/발표/캡처/20260805_C06_유방동870답_상추_밭등급.png">    </p:cNvPr>
+          <p:cNvPr id="10" name="Image 1" descr="D:/Projects/batboda/발표/캡처/20260805_C06_유방동870답_상추_밭등급.png"/>
           <p:cNvPicPr>
             <a:picLocks noChangeAspect="1"/>
           </p:cNvPicPr>
           <p:nvPr/>
         </p:nvPicPr>
         <p:blipFill>
-          <a:blip r:embed="rId2"/>
+          <a:blip r:embed="rId4"/>
           <a:stretch>
             <a:fillRect/>
           </a:stretch>
@@ -1972,7 +1757,7 @@
           <a:bodyPr wrap="square" lIns="0" tIns="0" rIns="0" bIns="0" rtlCol="0" anchor="ctr"/>
           <a:lstStyle/>
           <a:p>
-            <a:pPr algn="r" indent="0" marL="0">
+            <a:pPr marL="0" indent="0" algn="r">
               <a:buNone/>
             </a:pPr>
             <a:r>
@@ -2006,6 +1791,7 @@
         <a:solidFill>
           <a:srgbClr val="F7F9FA"/>
         </a:solidFill>
+        <a:effectLst/>
       </p:bgPr>
     </p:bg>
     <p:spTree>
@@ -2043,7 +1829,7 @@
           <a:bodyPr wrap="square" lIns="0" tIns="0" rIns="0" bIns="0" rtlCol="0" anchor="ctr"/>
           <a:lstStyle/>
           <a:p>
-            <a:pPr algn="r" indent="0" marL="0">
+            <a:pPr marL="0" indent="0" algn="r">
               <a:buNone/>
             </a:pPr>
             <a:r>
@@ -2082,7 +1868,7 @@
           <a:bodyPr wrap="square" lIns="0" tIns="0" rIns="0" bIns="0" rtlCol="0" anchor="t"/>
           <a:lstStyle/>
           <a:p>
-            <a:pPr indent="0" marL="0">
+            <a:pPr marL="0" indent="0">
               <a:lnSpc>
                 <a:spcPct val="118000"/>
               </a:lnSpc>
@@ -2102,7 +1888,7 @@
             <a:endParaRPr lang="en-US" sz="2800" dirty="0"/>
           </a:p>
           <a:p>
-            <a:pPr indent="0" marL="0">
+            <a:pPr marL="0" indent="0">
               <a:lnSpc>
                 <a:spcPct val="118000"/>
               </a:lnSpc>
@@ -2149,6 +1935,13 @@
             <a:prstDash val="solid"/>
           </a:ln>
         </p:spPr>
+        <p:txBody>
+          <a:bodyPr/>
+          <a:lstStyle/>
+          <a:p>
+            <a:endParaRPr lang="ko-KR" altLang="en-US"/>
+          </a:p>
+        </p:txBody>
       </p:sp>
       <p:sp>
         <p:nvSpPr>
@@ -2171,7 +1964,7 @@
           <a:bodyPr wrap="square" lIns="0" tIns="0" rIns="0" bIns="0" rtlCol="0" anchor="ctr"/>
           <a:lstStyle/>
           <a:p>
-            <a:pPr indent="0" marL="0">
+            <a:pPr marL="0" indent="0">
               <a:buNone/>
             </a:pPr>
             <a:r>
@@ -2191,14 +1984,14 @@
       </p:sp>
       <p:pic>
         <p:nvPicPr>
-          <p:cNvPr id="6" name="Image 0" descr="D:/Projects/batboda/발표/캡처/20260805_C01_대관령85-61전_경계.png">    </p:cNvPr>
+          <p:cNvPr id="6" name="Image 0" descr="D:/Projects/batboda/발표/캡처/20260805_C01_대관령85-61전_경계.png"/>
           <p:cNvPicPr>
             <a:picLocks noChangeAspect="1"/>
           </p:cNvPicPr>
           <p:nvPr/>
         </p:nvPicPr>
         <p:blipFill>
-          <a:blip r:embed="rId1"/>
+          <a:blip r:embed="rId3"/>
           <a:stretch>
             <a:fillRect/>
           </a:stretch>
@@ -2234,7 +2027,7 @@
           <a:bodyPr wrap="square" lIns="0" tIns="0" rIns="0" bIns="0" rtlCol="0" anchor="ctr"/>
           <a:lstStyle/>
           <a:p>
-            <a:pPr algn="r" indent="0" marL="0">
+            <a:pPr marL="0" indent="0" algn="r">
               <a:buNone/>
             </a:pPr>
             <a:r>
@@ -2268,6 +2061,7 @@
         <a:solidFill>
           <a:srgbClr val="F7F9FA"/>
         </a:solidFill>
+        <a:effectLst/>
       </p:bgPr>
     </p:bg>
     <p:spTree>
@@ -2284,157 +2078,17 @@
           <a:chExt cx="0" cy="0"/>
         </a:xfrm>
       </p:grpSpPr>
-      <p:sp>
-        <p:nvSpPr>
-          <p:cNvPr id="2" name="Text 0"/>
-          <p:cNvSpPr/>
-          <p:nvPr/>
-        </p:nvSpPr>
-        <p:spPr>
-          <a:xfrm>
-            <a:off x="8332927" y="384048"/>
-            <a:ext cx="3291840" cy="256032"/>
-          </a:xfrm>
-          <a:prstGeom prst="rect">
-            <a:avLst/>
-          </a:prstGeom>
-          <a:noFill/>
-          <a:ln/>
-        </p:spPr>
-        <p:txBody>
-          <a:bodyPr wrap="square" lIns="0" tIns="0" rIns="0" bIns="0" rtlCol="0" anchor="ctr"/>
-          <a:lstStyle/>
-          <a:p>
-            <a:pPr algn="r" indent="0" marL="0">
-              <a:buNone/>
-            </a:pPr>
-            <a:r>
-              <a:rPr lang="en-US" sz="1100" b="1" dirty="0">
-                <a:solidFill>
-                  <a:srgbClr val="0E7490"/>
-                </a:solidFill>
-                <a:latin typeface="맑은 고딕" pitchFamily="34" charset="0"/>
-                <a:ea typeface="맑은 고딕" pitchFamily="34" charset="-122"/>
-                <a:cs typeface="맑은 고딕" pitchFamily="34" charset="-120"/>
-              </a:rPr>
-              <a:t>화면 근거 · 03 사용한 자료 · 01-B</a:t>
-            </a:r>
-            <a:endParaRPr lang="en-US" sz="1100" dirty="0"/>
-          </a:p>
-        </p:txBody>
-      </p:sp>
-      <p:sp>
-        <p:nvSpPr>
-          <p:cNvPr id="3" name="Text 1"/>
-          <p:cNvSpPr/>
-          <p:nvPr/>
-        </p:nvSpPr>
-        <p:spPr>
-          <a:xfrm>
-            <a:off x="566928" y="822960"/>
-            <a:ext cx="11057839" cy="1234440"/>
-          </a:xfrm>
-          <a:prstGeom prst="rect">
-            <a:avLst/>
-          </a:prstGeom>
-          <a:noFill/>
-          <a:ln/>
-        </p:spPr>
-        <p:txBody>
-          <a:bodyPr wrap="square" lIns="0" tIns="0" rIns="0" bIns="0" rtlCol="0" anchor="t"/>
-          <a:lstStyle/>
-          <a:p>
-            <a:pPr indent="0" marL="0">
-              <a:lnSpc>
-                <a:spcPct val="118000"/>
-              </a:lnSpc>
-              <a:buNone/>
-            </a:pPr>
-            <a:r>
-              <a:rPr lang="en-US" sz="2700" b="1" dirty="0">
-                <a:solidFill>
-                  <a:srgbClr val="14181A"/>
-                </a:solidFill>
-                <a:latin typeface="맑은 고딕" pitchFamily="34" charset="0"/>
-                <a:ea typeface="맑은 고딕" pitchFamily="34" charset="-122"/>
-                <a:cs typeface="맑은 고딕" pitchFamily="34" charset="-120"/>
-              </a:rPr>
-              <a:t>자료가 없는 것이 아니라, 서로 다른 기관·단위에 있어</a:t>
-            </a:r>
-            <a:endParaRPr lang="en-US" sz="2700" dirty="0"/>
-          </a:p>
-          <a:p>
-            <a:pPr indent="0" marL="0">
-              <a:lnSpc>
-                <a:spcPct val="118000"/>
-              </a:lnSpc>
-              <a:buNone/>
-            </a:pPr>
-            <a:r>
-              <a:rPr lang="en-US" sz="2700" b="1" dirty="0">
-                <a:solidFill>
-                  <a:srgbClr val="14181A"/>
-                </a:solidFill>
-                <a:latin typeface="맑은 고딕" pitchFamily="34" charset="0"/>
-                <a:ea typeface="맑은 고딕" pitchFamily="34" charset="-122"/>
-                <a:cs typeface="맑은 고딕" pitchFamily="34" charset="-120"/>
-              </a:rPr>
-              <a:t>내 농지로 이어지지 않습니다</a:t>
-            </a:r>
-            <a:endParaRPr lang="en-US" sz="2700" dirty="0"/>
-          </a:p>
-        </p:txBody>
-      </p:sp>
-      <p:sp>
-        <p:nvSpPr>
-          <p:cNvPr id="4" name="Text 2"/>
-          <p:cNvSpPr/>
-          <p:nvPr/>
-        </p:nvSpPr>
-        <p:spPr>
-          <a:xfrm>
-            <a:off x="566928" y="1993392"/>
-            <a:ext cx="11057839" cy="292608"/>
-          </a:xfrm>
-          <a:prstGeom prst="rect">
-            <a:avLst/>
-          </a:prstGeom>
-          <a:noFill/>
-          <a:ln/>
-        </p:spPr>
-        <p:txBody>
-          <a:bodyPr wrap="square" lIns="0" tIns="0" rIns="0" bIns="0" rtlCol="0" anchor="ctr"/>
-          <a:lstStyle/>
-          <a:p>
-            <a:pPr indent="0" marL="0">
-              <a:buNone/>
-            </a:pPr>
-            <a:r>
-              <a:rPr lang="en-US" sz="1600" b="1" dirty="0">
-                <a:solidFill>
-                  <a:srgbClr val="0B5A72"/>
-                </a:solidFill>
-                <a:latin typeface="맑은 고딕" pitchFamily="34" charset="0"/>
-                <a:ea typeface="맑은 고딕" pitchFamily="34" charset="-122"/>
-                <a:cs typeface="맑은 고딕" pitchFamily="34" charset="-120"/>
-              </a:rPr>
-              <a:t>같은 농지에 대는 자료 넷이 4년 가까이 벌어져 있습니다</a:t>
-            </a:r>
-            <a:endParaRPr lang="en-US" sz="1600" dirty="0"/>
-          </a:p>
-        </p:txBody>
-      </p:sp>
       <p:pic>
         <p:nvPicPr>
-          <p:cNvPr id="5" name="Image 0" descr="D:/Projects/batboda/발표/캡처/20260805_C01_대관령85-61전_경계.png">    </p:cNvPr>
+          <p:cNvPr id="5" name="Image 0" descr="D:/Projects/batboda/발표/캡처/20260805_C01_대관령85-61전_경계.png"/>
           <p:cNvPicPr>
             <a:picLocks noChangeAspect="1"/>
           </p:cNvPicPr>
           <p:nvPr/>
         </p:nvPicPr>
         <p:blipFill>
-          <a:blip r:embed="rId1">
-            <a:alphaModFix amt="12000"/>
+          <a:blip r:embed="rId3">
+            <a:alphaModFix amt="58000"/>
           </a:blip>
           <a:stretch>
             <a:fillRect/>
@@ -2442,8 +2096,8 @@
         </p:blipFill>
         <p:spPr>
           <a:xfrm>
-            <a:off x="1920240" y="2377440"/>
-            <a:ext cx="8348472" cy="3712464"/>
+            <a:off x="0" y="0"/>
+            <a:ext cx="12197977" cy="6858000"/>
           </a:xfrm>
           <a:prstGeom prst="rect">
             <a:avLst/>
@@ -2452,619 +2106,808 @@
       </p:pic>
       <p:sp>
         <p:nvSpPr>
-          <p:cNvPr id="6" name="Shape 3"/>
-          <p:cNvSpPr/>
-          <p:nvPr/>
-        </p:nvSpPr>
-        <p:spPr>
-          <a:xfrm>
-            <a:off x="3325216" y="2615184"/>
-            <a:ext cx="2670048" cy="1481328"/>
-          </a:xfrm>
-          <a:prstGeom prst="roundRect">
-            <a:avLst>
-              <a:gd name="adj" fmla="val 3704"/>
-            </a:avLst>
-          </a:prstGeom>
-          <a:solidFill>
-            <a:srgbClr val="FFFFFF"/>
-          </a:solidFill>
-          <a:ln w="12700">
+          <p:cNvPr id="2" name="Text 0"/>
+          <p:cNvSpPr/>
+          <p:nvPr/>
+        </p:nvSpPr>
+        <p:spPr>
+          <a:xfrm>
+            <a:off x="8332927" y="384048"/>
+            <a:ext cx="3291840" cy="256032"/>
+          </a:xfrm>
+          <a:prstGeom prst="rect">
+            <a:avLst/>
+          </a:prstGeom>
+          <a:noFill/>
+          <a:ln/>
+        </p:spPr>
+        <p:txBody>
+          <a:bodyPr wrap="square" lIns="0" tIns="0" rIns="0" bIns="0" rtlCol="0" anchor="ctr"/>
+          <a:lstStyle/>
+          <a:p>
+            <a:pPr marL="0" indent="0" algn="r">
+              <a:buNone/>
+            </a:pPr>
+            <a:r>
+              <a:rPr lang="en-US" sz="1100" b="1" dirty="0">
+                <a:solidFill>
+                  <a:srgbClr val="0E7490"/>
+                </a:solidFill>
+                <a:latin typeface="맑은 고딕" pitchFamily="34" charset="0"/>
+                <a:ea typeface="맑은 고딕" pitchFamily="34" charset="-122"/>
+                <a:cs typeface="맑은 고딕" pitchFamily="34" charset="-120"/>
+              </a:rPr>
+              <a:t>화면 근거 · 03 사용한 자료 · 01-B</a:t>
+            </a:r>
+            <a:endParaRPr lang="en-US" sz="1100" dirty="0"/>
+          </a:p>
+        </p:txBody>
+      </p:sp>
+      <p:sp>
+        <p:nvSpPr>
+          <p:cNvPr id="3" name="Text 1"/>
+          <p:cNvSpPr/>
+          <p:nvPr/>
+        </p:nvSpPr>
+        <p:spPr>
+          <a:xfrm>
+            <a:off x="566928" y="822960"/>
+            <a:ext cx="11057839" cy="1234440"/>
+          </a:xfrm>
+          <a:prstGeom prst="rect">
+            <a:avLst/>
+          </a:prstGeom>
+          <a:noFill/>
+          <a:ln/>
+        </p:spPr>
+        <p:txBody>
+          <a:bodyPr wrap="square" lIns="0" tIns="0" rIns="0" bIns="0" rtlCol="0" anchor="t"/>
+          <a:lstStyle/>
+          <a:p>
+            <a:pPr marL="0" indent="0">
+              <a:lnSpc>
+                <a:spcPct val="118000"/>
+              </a:lnSpc>
+              <a:buNone/>
+            </a:pPr>
+            <a:r>
+              <a:rPr lang="en-US" sz="2700" b="1" dirty="0">
+                <a:solidFill>
+                  <a:srgbClr val="14181A"/>
+                </a:solidFill>
+                <a:latin typeface="맑은 고딕" pitchFamily="34" charset="0"/>
+                <a:ea typeface="맑은 고딕" pitchFamily="34" charset="-122"/>
+                <a:cs typeface="맑은 고딕" pitchFamily="34" charset="-120"/>
+              </a:rPr>
+              <a:t>자료가 없는 것이 아니라, 서로 다른 기관·단위에 있어</a:t>
+            </a:r>
+            <a:endParaRPr lang="en-US" sz="2700" dirty="0"/>
+          </a:p>
+          <a:p>
+            <a:pPr marL="0" indent="0">
+              <a:lnSpc>
+                <a:spcPct val="118000"/>
+              </a:lnSpc>
+              <a:buNone/>
+            </a:pPr>
+            <a:r>
+              <a:rPr lang="en-US" sz="2700" b="1" dirty="0">
+                <a:solidFill>
+                  <a:srgbClr val="14181A"/>
+                </a:solidFill>
+                <a:latin typeface="맑은 고딕" pitchFamily="34" charset="0"/>
+                <a:ea typeface="맑은 고딕" pitchFamily="34" charset="-122"/>
+                <a:cs typeface="맑은 고딕" pitchFamily="34" charset="-120"/>
+              </a:rPr>
+              <a:t>내 농지로 이어지지 않습니다</a:t>
+            </a:r>
+            <a:endParaRPr lang="en-US" sz="2700" dirty="0"/>
+          </a:p>
+        </p:txBody>
+      </p:sp>
+      <p:sp>
+        <p:nvSpPr>
+          <p:cNvPr id="4" name="Text 2"/>
+          <p:cNvSpPr/>
+          <p:nvPr/>
+        </p:nvSpPr>
+        <p:spPr>
+          <a:xfrm>
+            <a:off x="566928" y="1993392"/>
+            <a:ext cx="11057839" cy="292608"/>
+          </a:xfrm>
+          <a:prstGeom prst="rect">
+            <a:avLst/>
+          </a:prstGeom>
+          <a:noFill/>
+          <a:ln/>
+        </p:spPr>
+        <p:txBody>
+          <a:bodyPr wrap="square" lIns="0" tIns="0" rIns="0" bIns="0" rtlCol="0" anchor="ctr"/>
+          <a:lstStyle/>
+          <a:p>
+            <a:pPr marL="0" indent="0">
+              <a:buNone/>
+            </a:pPr>
+            <a:r>
+              <a:rPr lang="en-US" sz="1600" b="1" dirty="0">
+                <a:solidFill>
+                  <a:srgbClr val="0B5A72"/>
+                </a:solidFill>
+                <a:latin typeface="맑은 고딕" pitchFamily="34" charset="0"/>
+                <a:ea typeface="맑은 고딕" pitchFamily="34" charset="-122"/>
+                <a:cs typeface="맑은 고딕" pitchFamily="34" charset="-120"/>
+              </a:rPr>
+              <a:t>같은 농지에 대는 자료 넷이 4년 가까이 벌어져 있습니다</a:t>
+            </a:r>
+            <a:endParaRPr lang="en-US" sz="1600" dirty="0"/>
+          </a:p>
+        </p:txBody>
+      </p:sp>
+      <p:grpSp>
+        <p:nvGrpSpPr>
+          <p:cNvPr id="24" name="그룹 23">
+            <a:extLst>
+              <a:ext uri="{FF2B5EF4-FFF2-40B4-BE49-F238E27FC236}">
+                <a16:creationId xmlns:a16="http://schemas.microsoft.com/office/drawing/2014/main" id="{446E055E-05EE-2F1A-3A46-F6E96A4CBF1C}"/>
+              </a:ext>
+            </a:extLst>
+          </p:cNvPr>
+          <p:cNvGrpSpPr/>
+          <p:nvPr/>
+        </p:nvGrpSpPr>
+        <p:grpSpPr>
+          <a:xfrm>
+            <a:off x="6494792" y="1993391"/>
+            <a:ext cx="5541264" cy="4334257"/>
+            <a:chOff x="3325216" y="1481327"/>
+            <a:chExt cx="5541264" cy="4334257"/>
+          </a:xfrm>
+        </p:grpSpPr>
+        <p:sp>
+          <p:nvSpPr>
+            <p:cNvPr id="6" name="Shape 3"/>
+            <p:cNvSpPr/>
+            <p:nvPr/>
+          </p:nvSpPr>
+          <p:spPr>
+            <a:xfrm>
+              <a:off x="3325216" y="2615184"/>
+              <a:ext cx="2670048" cy="1481328"/>
+            </a:xfrm>
+            <a:prstGeom prst="roundRect">
+              <a:avLst>
+                <a:gd name="adj" fmla="val 3704"/>
+              </a:avLst>
+            </a:prstGeom>
             <a:solidFill>
-              <a:srgbClr val="B9C4C7"/>
+              <a:srgbClr val="FFFFFF"/>
             </a:solidFill>
-            <a:prstDash val="solid"/>
-          </a:ln>
-        </p:spPr>
-      </p:sp>
-      <p:sp>
-        <p:nvSpPr>
-          <p:cNvPr id="7" name="Text 4"/>
-          <p:cNvSpPr/>
-          <p:nvPr/>
-        </p:nvSpPr>
-        <p:spPr>
-          <a:xfrm>
-            <a:off x="3471520" y="2852928"/>
-            <a:ext cx="2377440" cy="420624"/>
-          </a:xfrm>
-          <a:prstGeom prst="rect">
-            <a:avLst/>
-          </a:prstGeom>
-          <a:noFill/>
-          <a:ln/>
-        </p:spPr>
-        <p:txBody>
-          <a:bodyPr wrap="square" lIns="0" tIns="0" rIns="0" bIns="0" rtlCol="0" anchor="t"/>
-          <a:lstStyle/>
-          <a:p>
-            <a:pPr algn="ctr" indent="0" marL="0">
-              <a:buNone/>
-            </a:pPr>
-            <a:r>
-              <a:rPr lang="en-US" sz="1800" b="1" dirty="0">
-                <a:solidFill>
-                  <a:srgbClr val="14181A"/>
-                </a:solidFill>
-                <a:latin typeface="맑은 고딕" pitchFamily="34" charset="0"/>
-                <a:ea typeface="맑은 고딕" pitchFamily="34" charset="-122"/>
-                <a:cs typeface="맑은 고딕" pitchFamily="34" charset="-120"/>
-              </a:rPr>
-              <a:t>농지 경계</a:t>
-            </a:r>
-            <a:endParaRPr lang="en-US" sz="1800" dirty="0"/>
-          </a:p>
-        </p:txBody>
-      </p:sp>
-      <p:sp>
-        <p:nvSpPr>
-          <p:cNvPr id="8" name="Text 5"/>
-          <p:cNvSpPr/>
-          <p:nvPr/>
-        </p:nvSpPr>
-        <p:spPr>
-          <a:xfrm>
-            <a:off x="3471520" y="3328416"/>
-            <a:ext cx="2377440" cy="256032"/>
-          </a:xfrm>
-          <a:prstGeom prst="rect">
-            <a:avLst/>
-          </a:prstGeom>
-          <a:noFill/>
-          <a:ln/>
-        </p:spPr>
-        <p:txBody>
-          <a:bodyPr wrap="square" lIns="0" tIns="0" rIns="0" bIns="0" rtlCol="0" anchor="ctr"/>
-          <a:lstStyle/>
-          <a:p>
-            <a:pPr algn="ctr" indent="0" marL="0">
-              <a:buNone/>
-            </a:pPr>
-            <a:r>
-              <a:rPr lang="en-US" sz="1250" dirty="0">
-                <a:solidFill>
-                  <a:srgbClr val="55636A"/>
-                </a:solidFill>
-                <a:latin typeface="맑은 고딕" pitchFamily="34" charset="0"/>
-                <a:ea typeface="맑은 고딕" pitchFamily="34" charset="-122"/>
-                <a:cs typeface="맑은 고딕" pitchFamily="34" charset="-120"/>
-              </a:rPr>
-              <a:t>농림축산식품부 팜맵</a:t>
-            </a:r>
-            <a:endParaRPr lang="en-US" sz="1250" dirty="0"/>
-          </a:p>
-        </p:txBody>
-      </p:sp>
-      <p:sp>
-        <p:nvSpPr>
-          <p:cNvPr id="9" name="Text 6"/>
-          <p:cNvSpPr/>
-          <p:nvPr/>
-        </p:nvSpPr>
-        <p:spPr>
-          <a:xfrm>
-            <a:off x="3471520" y="3584448"/>
-            <a:ext cx="2377440" cy="292608"/>
-          </a:xfrm>
-          <a:prstGeom prst="rect">
-            <a:avLst/>
-          </a:prstGeom>
-          <a:noFill/>
-          <a:ln/>
-        </p:spPr>
-        <p:txBody>
-          <a:bodyPr wrap="square" lIns="0" tIns="0" rIns="0" bIns="0" rtlCol="0" anchor="ctr"/>
-          <a:lstStyle/>
-          <a:p>
-            <a:pPr algn="ctr" indent="0" marL="0">
-              <a:buNone/>
-            </a:pPr>
-            <a:r>
-              <a:rPr lang="en-US" sz="1500" b="1" dirty="0">
-                <a:solidFill>
-                  <a:srgbClr val="0B5A72"/>
-                </a:solidFill>
-                <a:latin typeface="맑은 고딕" pitchFamily="34" charset="0"/>
-                <a:ea typeface="맑은 고딕" pitchFamily="34" charset="-122"/>
-                <a:cs typeface="맑은 고딕" pitchFamily="34" charset="-120"/>
-              </a:rPr>
-              <a:t>2022-12-30</a:t>
-            </a:r>
-            <a:endParaRPr lang="en-US" sz="1500" dirty="0"/>
-          </a:p>
-        </p:txBody>
-      </p:sp>
-      <p:sp>
-        <p:nvSpPr>
-          <p:cNvPr id="10" name="Shape 7"/>
-          <p:cNvSpPr/>
-          <p:nvPr/>
-        </p:nvSpPr>
-        <p:spPr>
-          <a:xfrm>
-            <a:off x="6196432" y="2615184"/>
-            <a:ext cx="2670048" cy="1481328"/>
-          </a:xfrm>
-          <a:prstGeom prst="roundRect">
-            <a:avLst>
-              <a:gd name="adj" fmla="val 3704"/>
-            </a:avLst>
-          </a:prstGeom>
-          <a:solidFill>
-            <a:srgbClr val="FFFFFF"/>
-          </a:solidFill>
-          <a:ln w="12700">
+            <a:ln w="12700">
+              <a:solidFill>
+                <a:srgbClr val="B9C4C7"/>
+              </a:solidFill>
+              <a:prstDash val="solid"/>
+            </a:ln>
+          </p:spPr>
+          <p:txBody>
+            <a:bodyPr/>
+            <a:lstStyle/>
+            <a:p>
+              <a:endParaRPr lang="ko-KR" altLang="en-US"/>
+            </a:p>
+          </p:txBody>
+        </p:sp>
+        <p:sp>
+          <p:nvSpPr>
+            <p:cNvPr id="7" name="Text 4"/>
+            <p:cNvSpPr/>
+            <p:nvPr/>
+          </p:nvSpPr>
+          <p:spPr>
+            <a:xfrm>
+              <a:off x="3471520" y="2852928"/>
+              <a:ext cx="2377440" cy="420624"/>
+            </a:xfrm>
+            <a:prstGeom prst="rect">
+              <a:avLst/>
+            </a:prstGeom>
+            <a:noFill/>
+            <a:ln/>
+          </p:spPr>
+          <p:txBody>
+            <a:bodyPr wrap="square" lIns="0" tIns="0" rIns="0" bIns="0" rtlCol="0" anchor="t"/>
+            <a:lstStyle/>
+            <a:p>
+              <a:pPr marL="0" indent="0" algn="ctr">
+                <a:buNone/>
+              </a:pPr>
+              <a:r>
+                <a:rPr lang="en-US" sz="1800" b="1" dirty="0">
+                  <a:solidFill>
+                    <a:srgbClr val="14181A"/>
+                  </a:solidFill>
+                  <a:latin typeface="맑은 고딕" pitchFamily="34" charset="0"/>
+                  <a:ea typeface="맑은 고딕" pitchFamily="34" charset="-122"/>
+                  <a:cs typeface="맑은 고딕" pitchFamily="34" charset="-120"/>
+                </a:rPr>
+                <a:t>농지 경계</a:t>
+              </a:r>
+              <a:endParaRPr lang="en-US" sz="1800" dirty="0"/>
+            </a:p>
+          </p:txBody>
+        </p:sp>
+        <p:sp>
+          <p:nvSpPr>
+            <p:cNvPr id="8" name="Text 5"/>
+            <p:cNvSpPr/>
+            <p:nvPr/>
+          </p:nvSpPr>
+          <p:spPr>
+            <a:xfrm>
+              <a:off x="3471520" y="3328416"/>
+              <a:ext cx="2377440" cy="256032"/>
+            </a:xfrm>
+            <a:prstGeom prst="rect">
+              <a:avLst/>
+            </a:prstGeom>
+            <a:noFill/>
+            <a:ln/>
+          </p:spPr>
+          <p:txBody>
+            <a:bodyPr wrap="square" lIns="0" tIns="0" rIns="0" bIns="0" rtlCol="0" anchor="ctr"/>
+            <a:lstStyle/>
+            <a:p>
+              <a:pPr marL="0" indent="0" algn="ctr">
+                <a:buNone/>
+              </a:pPr>
+              <a:r>
+                <a:rPr lang="en-US" sz="1250" dirty="0">
+                  <a:solidFill>
+                    <a:srgbClr val="55636A"/>
+                  </a:solidFill>
+                  <a:latin typeface="맑은 고딕" pitchFamily="34" charset="0"/>
+                  <a:ea typeface="맑은 고딕" pitchFamily="34" charset="-122"/>
+                  <a:cs typeface="맑은 고딕" pitchFamily="34" charset="-120"/>
+                </a:rPr>
+                <a:t>농림축산식품부 팜맵</a:t>
+              </a:r>
+              <a:endParaRPr lang="en-US" sz="1250" dirty="0"/>
+            </a:p>
+          </p:txBody>
+        </p:sp>
+        <p:sp>
+          <p:nvSpPr>
+            <p:cNvPr id="9" name="Text 6"/>
+            <p:cNvSpPr/>
+            <p:nvPr/>
+          </p:nvSpPr>
+          <p:spPr>
+            <a:xfrm>
+              <a:off x="3471520" y="3584448"/>
+              <a:ext cx="2377440" cy="292608"/>
+            </a:xfrm>
+            <a:prstGeom prst="rect">
+              <a:avLst/>
+            </a:prstGeom>
+            <a:noFill/>
+            <a:ln/>
+          </p:spPr>
+          <p:txBody>
+            <a:bodyPr wrap="square" lIns="0" tIns="0" rIns="0" bIns="0" rtlCol="0" anchor="ctr"/>
+            <a:lstStyle/>
+            <a:p>
+              <a:pPr marL="0" indent="0" algn="ctr">
+                <a:buNone/>
+              </a:pPr>
+              <a:r>
+                <a:rPr lang="en-US" sz="1500" b="1" dirty="0">
+                  <a:solidFill>
+                    <a:srgbClr val="0B5A72"/>
+                  </a:solidFill>
+                  <a:latin typeface="맑은 고딕" pitchFamily="34" charset="0"/>
+                  <a:ea typeface="맑은 고딕" pitchFamily="34" charset="-122"/>
+                  <a:cs typeface="맑은 고딕" pitchFamily="34" charset="-120"/>
+                </a:rPr>
+                <a:t>2022-12-30</a:t>
+              </a:r>
+              <a:endParaRPr lang="en-US" sz="1500" dirty="0"/>
+            </a:p>
+          </p:txBody>
+        </p:sp>
+        <p:sp>
+          <p:nvSpPr>
+            <p:cNvPr id="10" name="Shape 7"/>
+            <p:cNvSpPr/>
+            <p:nvPr/>
+          </p:nvSpPr>
+          <p:spPr>
+            <a:xfrm>
+              <a:off x="6196432" y="2615184"/>
+              <a:ext cx="2670048" cy="1481328"/>
+            </a:xfrm>
+            <a:prstGeom prst="roundRect">
+              <a:avLst>
+                <a:gd name="adj" fmla="val 3704"/>
+              </a:avLst>
+            </a:prstGeom>
             <a:solidFill>
-              <a:srgbClr val="B9C4C7"/>
+              <a:srgbClr val="FFFFFF"/>
             </a:solidFill>
-            <a:prstDash val="solid"/>
-          </a:ln>
-        </p:spPr>
-      </p:sp>
-      <p:sp>
-        <p:nvSpPr>
-          <p:cNvPr id="11" name="Text 8"/>
-          <p:cNvSpPr/>
-          <p:nvPr/>
-        </p:nvSpPr>
-        <p:spPr>
-          <a:xfrm>
-            <a:off x="6342736" y="2852928"/>
-            <a:ext cx="2377440" cy="420624"/>
-          </a:xfrm>
-          <a:prstGeom prst="rect">
-            <a:avLst/>
-          </a:prstGeom>
-          <a:noFill/>
-          <a:ln/>
-        </p:spPr>
-        <p:txBody>
-          <a:bodyPr wrap="square" lIns="0" tIns="0" rIns="0" bIns="0" rtlCol="0" anchor="t"/>
-          <a:lstStyle/>
-          <a:p>
-            <a:pPr algn="ctr" indent="0" marL="0">
-              <a:buNone/>
-            </a:pPr>
-            <a:r>
-              <a:rPr lang="en-US" sz="1800" b="1" dirty="0">
-                <a:solidFill>
-                  <a:srgbClr val="14181A"/>
-                </a:solidFill>
-                <a:latin typeface="맑은 고딕" pitchFamily="34" charset="0"/>
-                <a:ea typeface="맑은 고딕" pitchFamily="34" charset="-122"/>
-                <a:cs typeface="맑은 고딕" pitchFamily="34" charset="-120"/>
-              </a:rPr>
-              <a:t>토양 특성·화학성</a:t>
-            </a:r>
-            <a:endParaRPr lang="en-US" sz="1800" dirty="0"/>
-          </a:p>
-        </p:txBody>
-      </p:sp>
-      <p:sp>
-        <p:nvSpPr>
-          <p:cNvPr id="12" name="Text 9"/>
-          <p:cNvSpPr/>
-          <p:nvPr/>
-        </p:nvSpPr>
-        <p:spPr>
-          <a:xfrm>
-            <a:off x="6342736" y="3328416"/>
-            <a:ext cx="2377440" cy="256032"/>
-          </a:xfrm>
-          <a:prstGeom prst="rect">
-            <a:avLst/>
-          </a:prstGeom>
-          <a:noFill/>
-          <a:ln/>
-        </p:spPr>
-        <p:txBody>
-          <a:bodyPr wrap="square" lIns="0" tIns="0" rIns="0" bIns="0" rtlCol="0" anchor="ctr"/>
-          <a:lstStyle/>
-          <a:p>
-            <a:pPr algn="ctr" indent="0" marL="0">
-              <a:buNone/>
-            </a:pPr>
-            <a:r>
-              <a:rPr lang="en-US" sz="1250" dirty="0">
-                <a:solidFill>
-                  <a:srgbClr val="55636A"/>
-                </a:solidFill>
-                <a:latin typeface="맑은 고딕" pitchFamily="34" charset="0"/>
-                <a:ea typeface="맑은 고딕" pitchFamily="34" charset="-122"/>
-                <a:cs typeface="맑은 고딕" pitchFamily="34" charset="-120"/>
-              </a:rPr>
-              <a:t>농촌진흥청</a:t>
-            </a:r>
-            <a:endParaRPr lang="en-US" sz="1250" dirty="0"/>
-          </a:p>
-        </p:txBody>
-      </p:sp>
-      <p:sp>
-        <p:nvSpPr>
-          <p:cNvPr id="13" name="Text 10"/>
-          <p:cNvSpPr/>
-          <p:nvPr/>
-        </p:nvSpPr>
-        <p:spPr>
-          <a:xfrm>
-            <a:off x="6342736" y="3584448"/>
-            <a:ext cx="2377440" cy="292608"/>
-          </a:xfrm>
-          <a:prstGeom prst="rect">
-            <a:avLst/>
-          </a:prstGeom>
-          <a:noFill/>
-          <a:ln/>
-        </p:spPr>
-        <p:txBody>
-          <a:bodyPr wrap="square" lIns="0" tIns="0" rIns="0" bIns="0" rtlCol="0" anchor="ctr"/>
-          <a:lstStyle/>
-          <a:p>
-            <a:pPr algn="ctr" indent="0" marL="0">
-              <a:buNone/>
-            </a:pPr>
-            <a:r>
-              <a:rPr lang="en-US" sz="1500" b="1" dirty="0">
-                <a:solidFill>
-                  <a:srgbClr val="0B5A72"/>
-                </a:solidFill>
-                <a:latin typeface="맑은 고딕" pitchFamily="34" charset="0"/>
-                <a:ea typeface="맑은 고딕" pitchFamily="34" charset="-122"/>
-                <a:cs typeface="맑은 고딕" pitchFamily="34" charset="-120"/>
-              </a:rPr>
-              <a:t>2025-05-02</a:t>
-            </a:r>
-            <a:endParaRPr lang="en-US" sz="1500" dirty="0"/>
-          </a:p>
-        </p:txBody>
-      </p:sp>
-      <p:sp>
-        <p:nvSpPr>
-          <p:cNvPr id="14" name="Shape 11"/>
-          <p:cNvSpPr/>
-          <p:nvPr/>
-        </p:nvSpPr>
-        <p:spPr>
-          <a:xfrm>
-            <a:off x="3325216" y="4334256"/>
-            <a:ext cx="2670048" cy="1481328"/>
-          </a:xfrm>
-          <a:prstGeom prst="roundRect">
-            <a:avLst>
-              <a:gd name="adj" fmla="val 3704"/>
-            </a:avLst>
-          </a:prstGeom>
-          <a:solidFill>
-            <a:srgbClr val="FFFFFF"/>
-          </a:solidFill>
-          <a:ln w="12700">
+            <a:ln w="12700">
+              <a:solidFill>
+                <a:srgbClr val="B9C4C7"/>
+              </a:solidFill>
+              <a:prstDash val="solid"/>
+            </a:ln>
+          </p:spPr>
+          <p:txBody>
+            <a:bodyPr/>
+            <a:lstStyle/>
+            <a:p>
+              <a:endParaRPr lang="ko-KR" altLang="en-US"/>
+            </a:p>
+          </p:txBody>
+        </p:sp>
+        <p:sp>
+          <p:nvSpPr>
+            <p:cNvPr id="11" name="Text 8"/>
+            <p:cNvSpPr/>
+            <p:nvPr/>
+          </p:nvSpPr>
+          <p:spPr>
+            <a:xfrm>
+              <a:off x="6342736" y="2852928"/>
+              <a:ext cx="2377440" cy="420624"/>
+            </a:xfrm>
+            <a:prstGeom prst="rect">
+              <a:avLst/>
+            </a:prstGeom>
+            <a:noFill/>
+            <a:ln/>
+          </p:spPr>
+          <p:txBody>
+            <a:bodyPr wrap="square" lIns="0" tIns="0" rIns="0" bIns="0" rtlCol="0" anchor="t"/>
+            <a:lstStyle/>
+            <a:p>
+              <a:pPr marL="0" indent="0" algn="ctr">
+                <a:buNone/>
+              </a:pPr>
+              <a:r>
+                <a:rPr lang="en-US" sz="1800" b="1" dirty="0">
+                  <a:solidFill>
+                    <a:srgbClr val="14181A"/>
+                  </a:solidFill>
+                  <a:latin typeface="맑은 고딕" pitchFamily="34" charset="0"/>
+                  <a:ea typeface="맑은 고딕" pitchFamily="34" charset="-122"/>
+                  <a:cs typeface="맑은 고딕" pitchFamily="34" charset="-120"/>
+                </a:rPr>
+                <a:t>토양 특성·화학성</a:t>
+              </a:r>
+              <a:endParaRPr lang="en-US" sz="1800" dirty="0"/>
+            </a:p>
+          </p:txBody>
+        </p:sp>
+        <p:sp>
+          <p:nvSpPr>
+            <p:cNvPr id="12" name="Text 9"/>
+            <p:cNvSpPr/>
+            <p:nvPr/>
+          </p:nvSpPr>
+          <p:spPr>
+            <a:xfrm>
+              <a:off x="6342736" y="3328416"/>
+              <a:ext cx="2377440" cy="256032"/>
+            </a:xfrm>
+            <a:prstGeom prst="rect">
+              <a:avLst/>
+            </a:prstGeom>
+            <a:noFill/>
+            <a:ln/>
+          </p:spPr>
+          <p:txBody>
+            <a:bodyPr wrap="square" lIns="0" tIns="0" rIns="0" bIns="0" rtlCol="0" anchor="ctr"/>
+            <a:lstStyle/>
+            <a:p>
+              <a:pPr marL="0" indent="0" algn="ctr">
+                <a:buNone/>
+              </a:pPr>
+              <a:r>
+                <a:rPr lang="en-US" sz="1250" dirty="0">
+                  <a:solidFill>
+                    <a:srgbClr val="55636A"/>
+                  </a:solidFill>
+                  <a:latin typeface="맑은 고딕" pitchFamily="34" charset="0"/>
+                  <a:ea typeface="맑은 고딕" pitchFamily="34" charset="-122"/>
+                  <a:cs typeface="맑은 고딕" pitchFamily="34" charset="-120"/>
+                </a:rPr>
+                <a:t>농촌진흥청</a:t>
+              </a:r>
+              <a:endParaRPr lang="en-US" sz="1250" dirty="0"/>
+            </a:p>
+          </p:txBody>
+        </p:sp>
+        <p:sp>
+          <p:nvSpPr>
+            <p:cNvPr id="13" name="Text 10"/>
+            <p:cNvSpPr/>
+            <p:nvPr/>
+          </p:nvSpPr>
+          <p:spPr>
+            <a:xfrm>
+              <a:off x="6342736" y="3584448"/>
+              <a:ext cx="2377440" cy="292608"/>
+            </a:xfrm>
+            <a:prstGeom prst="rect">
+              <a:avLst/>
+            </a:prstGeom>
+            <a:noFill/>
+            <a:ln/>
+          </p:spPr>
+          <p:txBody>
+            <a:bodyPr wrap="square" lIns="0" tIns="0" rIns="0" bIns="0" rtlCol="0" anchor="ctr"/>
+            <a:lstStyle/>
+            <a:p>
+              <a:pPr marL="0" indent="0" algn="ctr">
+                <a:buNone/>
+              </a:pPr>
+              <a:r>
+                <a:rPr lang="en-US" sz="1500" b="1" dirty="0">
+                  <a:solidFill>
+                    <a:srgbClr val="0B5A72"/>
+                  </a:solidFill>
+                  <a:latin typeface="맑은 고딕" pitchFamily="34" charset="0"/>
+                  <a:ea typeface="맑은 고딕" pitchFamily="34" charset="-122"/>
+                  <a:cs typeface="맑은 고딕" pitchFamily="34" charset="-120"/>
+                </a:rPr>
+                <a:t>2025-05-02</a:t>
+              </a:r>
+              <a:endParaRPr lang="en-US" sz="1500" dirty="0"/>
+            </a:p>
+          </p:txBody>
+        </p:sp>
+        <p:sp>
+          <p:nvSpPr>
+            <p:cNvPr id="14" name="Shape 11"/>
+            <p:cNvSpPr/>
+            <p:nvPr/>
+          </p:nvSpPr>
+          <p:spPr>
+            <a:xfrm>
+              <a:off x="3325216" y="4334256"/>
+              <a:ext cx="2670048" cy="1481328"/>
+            </a:xfrm>
+            <a:prstGeom prst="roundRect">
+              <a:avLst>
+                <a:gd name="adj" fmla="val 3704"/>
+              </a:avLst>
+            </a:prstGeom>
             <a:solidFill>
-              <a:srgbClr val="B9C4C7"/>
+              <a:srgbClr val="FFFFFF"/>
             </a:solidFill>
-            <a:prstDash val="solid"/>
-          </a:ln>
-        </p:spPr>
-      </p:sp>
-      <p:sp>
-        <p:nvSpPr>
-          <p:cNvPr id="15" name="Text 12"/>
-          <p:cNvSpPr/>
-          <p:nvPr/>
-        </p:nvSpPr>
-        <p:spPr>
-          <a:xfrm>
-            <a:off x="3471520" y="4572000"/>
-            <a:ext cx="2377440" cy="420624"/>
-          </a:xfrm>
-          <a:prstGeom prst="rect">
-            <a:avLst/>
-          </a:prstGeom>
-          <a:noFill/>
-          <a:ln/>
-        </p:spPr>
-        <p:txBody>
-          <a:bodyPr wrap="square" lIns="0" tIns="0" rIns="0" bIns="0" rtlCol="0" anchor="t"/>
-          <a:lstStyle/>
-          <a:p>
-            <a:pPr algn="ctr" indent="0" marL="0">
-              <a:buNone/>
-            </a:pPr>
-            <a:r>
-              <a:rPr lang="en-US" sz="1800" b="1" dirty="0">
-                <a:solidFill>
-                  <a:srgbClr val="14181A"/>
-                </a:solidFill>
-                <a:latin typeface="맑은 고딕" pitchFamily="34" charset="0"/>
-                <a:ea typeface="맑은 고딕" pitchFamily="34" charset="-122"/>
-                <a:cs typeface="맑은 고딕" pitchFamily="34" charset="-120"/>
-              </a:rPr>
-              <a:t>단기예보</a:t>
-            </a:r>
-            <a:endParaRPr lang="en-US" sz="1800" dirty="0"/>
-          </a:p>
-        </p:txBody>
-      </p:sp>
-      <p:sp>
-        <p:nvSpPr>
-          <p:cNvPr id="16" name="Text 13"/>
-          <p:cNvSpPr/>
-          <p:nvPr/>
-        </p:nvSpPr>
-        <p:spPr>
-          <a:xfrm>
-            <a:off x="3471520" y="5047488"/>
-            <a:ext cx="2377440" cy="256032"/>
-          </a:xfrm>
-          <a:prstGeom prst="rect">
-            <a:avLst/>
-          </a:prstGeom>
-          <a:noFill/>
-          <a:ln/>
-        </p:spPr>
-        <p:txBody>
-          <a:bodyPr wrap="square" lIns="0" tIns="0" rIns="0" bIns="0" rtlCol="0" anchor="ctr"/>
-          <a:lstStyle/>
-          <a:p>
-            <a:pPr algn="ctr" indent="0" marL="0">
-              <a:buNone/>
-            </a:pPr>
-            <a:r>
-              <a:rPr lang="en-US" sz="1250" dirty="0">
-                <a:solidFill>
-                  <a:srgbClr val="55636A"/>
-                </a:solidFill>
-                <a:latin typeface="맑은 고딕" pitchFamily="34" charset="0"/>
-                <a:ea typeface="맑은 고딕" pitchFamily="34" charset="-122"/>
-                <a:cs typeface="맑은 고딕" pitchFamily="34" charset="-120"/>
-              </a:rPr>
-              <a:t>기상청</a:t>
-            </a:r>
-            <a:endParaRPr lang="en-US" sz="1250" dirty="0"/>
-          </a:p>
-        </p:txBody>
-      </p:sp>
-      <p:sp>
-        <p:nvSpPr>
-          <p:cNvPr id="17" name="Text 14"/>
-          <p:cNvSpPr/>
-          <p:nvPr/>
-        </p:nvSpPr>
-        <p:spPr>
-          <a:xfrm>
-            <a:off x="3471520" y="5303520"/>
-            <a:ext cx="2377440" cy="292608"/>
-          </a:xfrm>
-          <a:prstGeom prst="rect">
-            <a:avLst/>
-          </a:prstGeom>
-          <a:noFill/>
-          <a:ln/>
-        </p:spPr>
-        <p:txBody>
-          <a:bodyPr wrap="square" lIns="0" tIns="0" rIns="0" bIns="0" rtlCol="0" anchor="ctr"/>
-          <a:lstStyle/>
-          <a:p>
-            <a:pPr algn="ctr" indent="0" marL="0">
-              <a:buNone/>
-            </a:pPr>
-            <a:r>
-              <a:rPr lang="en-US" sz="1500" b="1" dirty="0">
-                <a:solidFill>
-                  <a:srgbClr val="0B5A72"/>
-                </a:solidFill>
-                <a:latin typeface="맑은 고딕" pitchFamily="34" charset="0"/>
-                <a:ea typeface="맑은 고딕" pitchFamily="34" charset="-122"/>
-                <a:cs typeface="맑은 고딕" pitchFamily="34" charset="-120"/>
-              </a:rPr>
-              <a:t>2026-08-05 08:00</a:t>
-            </a:r>
-            <a:endParaRPr lang="en-US" sz="1500" dirty="0"/>
-          </a:p>
-        </p:txBody>
-      </p:sp>
-      <p:sp>
-        <p:nvSpPr>
-          <p:cNvPr id="18" name="Shape 15"/>
-          <p:cNvSpPr/>
-          <p:nvPr/>
-        </p:nvSpPr>
-        <p:spPr>
-          <a:xfrm>
-            <a:off x="6196432" y="4334256"/>
-            <a:ext cx="2670048" cy="1481328"/>
-          </a:xfrm>
-          <a:prstGeom prst="roundRect">
-            <a:avLst>
-              <a:gd name="adj" fmla="val 3704"/>
-            </a:avLst>
-          </a:prstGeom>
-          <a:solidFill>
-            <a:srgbClr val="FFFFFF"/>
-          </a:solidFill>
-          <a:ln w="12700">
+            <a:ln w="12700">
+              <a:solidFill>
+                <a:srgbClr val="B9C4C7"/>
+              </a:solidFill>
+              <a:prstDash val="solid"/>
+            </a:ln>
+          </p:spPr>
+          <p:txBody>
+            <a:bodyPr/>
+            <a:lstStyle/>
+            <a:p>
+              <a:endParaRPr lang="ko-KR" altLang="en-US"/>
+            </a:p>
+          </p:txBody>
+        </p:sp>
+        <p:sp>
+          <p:nvSpPr>
+            <p:cNvPr id="15" name="Text 12"/>
+            <p:cNvSpPr/>
+            <p:nvPr/>
+          </p:nvSpPr>
+          <p:spPr>
+            <a:xfrm>
+              <a:off x="3471520" y="4572000"/>
+              <a:ext cx="2377440" cy="420624"/>
+            </a:xfrm>
+            <a:prstGeom prst="rect">
+              <a:avLst/>
+            </a:prstGeom>
+            <a:noFill/>
+            <a:ln/>
+          </p:spPr>
+          <p:txBody>
+            <a:bodyPr wrap="square" lIns="0" tIns="0" rIns="0" bIns="0" rtlCol="0" anchor="t"/>
+            <a:lstStyle/>
+            <a:p>
+              <a:pPr marL="0" indent="0" algn="ctr">
+                <a:buNone/>
+              </a:pPr>
+              <a:r>
+                <a:rPr lang="en-US" sz="1800" b="1" dirty="0">
+                  <a:solidFill>
+                    <a:srgbClr val="14181A"/>
+                  </a:solidFill>
+                  <a:latin typeface="맑은 고딕" pitchFamily="34" charset="0"/>
+                  <a:ea typeface="맑은 고딕" pitchFamily="34" charset="-122"/>
+                  <a:cs typeface="맑은 고딕" pitchFamily="34" charset="-120"/>
+                </a:rPr>
+                <a:t>단기예보</a:t>
+              </a:r>
+              <a:endParaRPr lang="en-US" sz="1800" dirty="0"/>
+            </a:p>
+          </p:txBody>
+        </p:sp>
+        <p:sp>
+          <p:nvSpPr>
+            <p:cNvPr id="16" name="Text 13"/>
+            <p:cNvSpPr/>
+            <p:nvPr/>
+          </p:nvSpPr>
+          <p:spPr>
+            <a:xfrm>
+              <a:off x="3471520" y="5047488"/>
+              <a:ext cx="2377440" cy="256032"/>
+            </a:xfrm>
+            <a:prstGeom prst="rect">
+              <a:avLst/>
+            </a:prstGeom>
+            <a:noFill/>
+            <a:ln/>
+          </p:spPr>
+          <p:txBody>
+            <a:bodyPr wrap="square" lIns="0" tIns="0" rIns="0" bIns="0" rtlCol="0" anchor="ctr"/>
+            <a:lstStyle/>
+            <a:p>
+              <a:pPr marL="0" indent="0" algn="ctr">
+                <a:buNone/>
+              </a:pPr>
+              <a:r>
+                <a:rPr lang="en-US" sz="1250" dirty="0">
+                  <a:solidFill>
+                    <a:srgbClr val="55636A"/>
+                  </a:solidFill>
+                  <a:latin typeface="맑은 고딕" pitchFamily="34" charset="0"/>
+                  <a:ea typeface="맑은 고딕" pitchFamily="34" charset="-122"/>
+                  <a:cs typeface="맑은 고딕" pitchFamily="34" charset="-120"/>
+                </a:rPr>
+                <a:t>기상청</a:t>
+              </a:r>
+              <a:endParaRPr lang="en-US" sz="1250" dirty="0"/>
+            </a:p>
+          </p:txBody>
+        </p:sp>
+        <p:sp>
+          <p:nvSpPr>
+            <p:cNvPr id="17" name="Text 14"/>
+            <p:cNvSpPr/>
+            <p:nvPr/>
+          </p:nvSpPr>
+          <p:spPr>
+            <a:xfrm>
+              <a:off x="3471520" y="5303520"/>
+              <a:ext cx="2377440" cy="292608"/>
+            </a:xfrm>
+            <a:prstGeom prst="rect">
+              <a:avLst/>
+            </a:prstGeom>
+            <a:noFill/>
+            <a:ln/>
+          </p:spPr>
+          <p:txBody>
+            <a:bodyPr wrap="square" lIns="0" tIns="0" rIns="0" bIns="0" rtlCol="0" anchor="ctr"/>
+            <a:lstStyle/>
+            <a:p>
+              <a:pPr marL="0" indent="0" algn="ctr">
+                <a:buNone/>
+              </a:pPr>
+              <a:r>
+                <a:rPr lang="en-US" sz="1500" b="1" dirty="0">
+                  <a:solidFill>
+                    <a:srgbClr val="0B5A72"/>
+                  </a:solidFill>
+                  <a:latin typeface="맑은 고딕" pitchFamily="34" charset="0"/>
+                  <a:ea typeface="맑은 고딕" pitchFamily="34" charset="-122"/>
+                  <a:cs typeface="맑은 고딕" pitchFamily="34" charset="-120"/>
+                </a:rPr>
+                <a:t>2026-08-05 08:00</a:t>
+              </a:r>
+              <a:endParaRPr lang="en-US" sz="1500" dirty="0"/>
+            </a:p>
+          </p:txBody>
+        </p:sp>
+        <p:sp>
+          <p:nvSpPr>
+            <p:cNvPr id="18" name="Shape 15"/>
+            <p:cNvSpPr/>
+            <p:nvPr/>
+          </p:nvSpPr>
+          <p:spPr>
+            <a:xfrm>
+              <a:off x="6196432" y="4334256"/>
+              <a:ext cx="2670048" cy="1481328"/>
+            </a:xfrm>
+            <a:prstGeom prst="roundRect">
+              <a:avLst>
+                <a:gd name="adj" fmla="val 3704"/>
+              </a:avLst>
+            </a:prstGeom>
             <a:solidFill>
-              <a:srgbClr val="B9C4C7"/>
+              <a:srgbClr val="FFFFFF"/>
             </a:solidFill>
-            <a:prstDash val="solid"/>
-          </a:ln>
-        </p:spPr>
-      </p:sp>
-      <p:sp>
-        <p:nvSpPr>
-          <p:cNvPr id="19" name="Text 16"/>
-          <p:cNvSpPr/>
-          <p:nvPr/>
-        </p:nvSpPr>
-        <p:spPr>
-          <a:xfrm>
-            <a:off x="6342736" y="4572000"/>
-            <a:ext cx="2377440" cy="420624"/>
-          </a:xfrm>
-          <a:prstGeom prst="rect">
-            <a:avLst/>
-          </a:prstGeom>
-          <a:noFill/>
-          <a:ln/>
-        </p:spPr>
-        <p:txBody>
-          <a:bodyPr wrap="square" lIns="0" tIns="0" rIns="0" bIns="0" rtlCol="0" anchor="t"/>
-          <a:lstStyle/>
-          <a:p>
-            <a:pPr algn="ctr" indent="0" marL="0">
-              <a:buNone/>
-            </a:pPr>
-            <a:r>
-              <a:rPr lang="en-US" sz="1800" b="1" dirty="0">
-                <a:solidFill>
-                  <a:srgbClr val="14181A"/>
-                </a:solidFill>
-                <a:latin typeface="맑은 고딕" pitchFamily="34" charset="0"/>
-                <a:ea typeface="맑은 고딕" pitchFamily="34" charset="-122"/>
-                <a:cs typeface="맑은 고딕" pitchFamily="34" charset="-120"/>
-              </a:rPr>
-              <a:t>최근 7일 관측</a:t>
-            </a:r>
-            <a:endParaRPr lang="en-US" sz="1800" dirty="0"/>
-          </a:p>
-        </p:txBody>
-      </p:sp>
-      <p:sp>
-        <p:nvSpPr>
-          <p:cNvPr id="20" name="Text 17"/>
-          <p:cNvSpPr/>
-          <p:nvPr/>
-        </p:nvSpPr>
-        <p:spPr>
-          <a:xfrm>
-            <a:off x="6342736" y="5047488"/>
-            <a:ext cx="2377440" cy="256032"/>
-          </a:xfrm>
-          <a:prstGeom prst="rect">
-            <a:avLst/>
-          </a:prstGeom>
-          <a:noFill/>
-          <a:ln/>
-        </p:spPr>
-        <p:txBody>
-          <a:bodyPr wrap="square" lIns="0" tIns="0" rIns="0" bIns="0" rtlCol="0" anchor="ctr"/>
-          <a:lstStyle/>
-          <a:p>
-            <a:pPr algn="ctr" indent="0" marL="0">
-              <a:buNone/>
-            </a:pPr>
-            <a:r>
-              <a:rPr lang="en-US" sz="1250" dirty="0">
-                <a:solidFill>
-                  <a:srgbClr val="55636A"/>
-                </a:solidFill>
-                <a:latin typeface="맑은 고딕" pitchFamily="34" charset="0"/>
-                <a:ea typeface="맑은 고딕" pitchFamily="34" charset="-122"/>
-                <a:cs typeface="맑은 고딕" pitchFamily="34" charset="-120"/>
-              </a:rPr>
-              <a:t>농촌진흥청</a:t>
-            </a:r>
-            <a:endParaRPr lang="en-US" sz="1250" dirty="0"/>
-          </a:p>
-        </p:txBody>
-      </p:sp>
-      <p:sp>
-        <p:nvSpPr>
-          <p:cNvPr id="21" name="Text 18"/>
-          <p:cNvSpPr/>
-          <p:nvPr/>
-        </p:nvSpPr>
-        <p:spPr>
-          <a:xfrm>
-            <a:off x="6342736" y="5303520"/>
-            <a:ext cx="2377440" cy="292608"/>
-          </a:xfrm>
-          <a:prstGeom prst="rect">
-            <a:avLst/>
-          </a:prstGeom>
-          <a:noFill/>
-          <a:ln/>
-        </p:spPr>
-        <p:txBody>
-          <a:bodyPr wrap="square" lIns="0" tIns="0" rIns="0" bIns="0" rtlCol="0" anchor="ctr"/>
-          <a:lstStyle/>
-          <a:p>
-            <a:pPr algn="ctr" indent="0" marL="0">
-              <a:buNone/>
-            </a:pPr>
-            <a:r>
-              <a:rPr lang="en-US" sz="1500" b="1" dirty="0">
-                <a:solidFill>
-                  <a:srgbClr val="0B5A72"/>
-                </a:solidFill>
-                <a:latin typeface="맑은 고딕" pitchFamily="34" charset="0"/>
-                <a:ea typeface="맑은 고딕" pitchFamily="34" charset="-122"/>
-                <a:cs typeface="맑은 고딕" pitchFamily="34" charset="-120"/>
-              </a:rPr>
-              <a:t>2026-07-29~08-04</a:t>
-            </a:r>
-            <a:endParaRPr lang="en-US" sz="1500" dirty="0"/>
-          </a:p>
-        </p:txBody>
-      </p:sp>
-      <p:sp>
-        <p:nvSpPr>
-          <p:cNvPr id="22" name="Text 19"/>
-          <p:cNvSpPr/>
-          <p:nvPr/>
-        </p:nvSpPr>
-        <p:spPr>
-          <a:xfrm>
-            <a:off x="4267048" y="5760720"/>
-            <a:ext cx="3657600" cy="292608"/>
-          </a:xfrm>
-          <a:prstGeom prst="rect">
-            <a:avLst/>
-          </a:prstGeom>
-          <a:noFill/>
-          <a:ln/>
-        </p:spPr>
-        <p:txBody>
-          <a:bodyPr wrap="square" lIns="0" tIns="0" rIns="0" bIns="0" rtlCol="0" anchor="ctr"/>
-          <a:lstStyle/>
-          <a:p>
-            <a:pPr algn="ctr" indent="0" marL="0">
-              <a:buNone/>
-            </a:pPr>
-            <a:r>
-              <a:rPr lang="en-US" sz="1400" b="1" dirty="0">
-                <a:solidFill>
-                  <a:srgbClr val="55636A"/>
-                </a:solidFill>
-                <a:latin typeface="맑은 고딕" pitchFamily="34" charset="0"/>
-                <a:ea typeface="맑은 고딕" pitchFamily="34" charset="-122"/>
-                <a:cs typeface="맑은 고딕" pitchFamily="34" charset="-120"/>
-              </a:rPr>
-              <a:t>대관령면 85-61전 · 한 필지</a:t>
-            </a:r>
-            <a:endParaRPr lang="en-US" sz="1400" dirty="0"/>
-          </a:p>
-        </p:txBody>
-      </p:sp>
+            <a:ln w="12700">
+              <a:solidFill>
+                <a:srgbClr val="B9C4C7"/>
+              </a:solidFill>
+              <a:prstDash val="solid"/>
+            </a:ln>
+          </p:spPr>
+          <p:txBody>
+            <a:bodyPr/>
+            <a:lstStyle/>
+            <a:p>
+              <a:endParaRPr lang="ko-KR" altLang="en-US"/>
+            </a:p>
+          </p:txBody>
+        </p:sp>
+        <p:sp>
+          <p:nvSpPr>
+            <p:cNvPr id="19" name="Text 16"/>
+            <p:cNvSpPr/>
+            <p:nvPr/>
+          </p:nvSpPr>
+          <p:spPr>
+            <a:xfrm>
+              <a:off x="6342736" y="4572000"/>
+              <a:ext cx="2377440" cy="420624"/>
+            </a:xfrm>
+            <a:prstGeom prst="rect">
+              <a:avLst/>
+            </a:prstGeom>
+            <a:noFill/>
+            <a:ln/>
+          </p:spPr>
+          <p:txBody>
+            <a:bodyPr wrap="square" lIns="0" tIns="0" rIns="0" bIns="0" rtlCol="0" anchor="t"/>
+            <a:lstStyle/>
+            <a:p>
+              <a:pPr marL="0" indent="0" algn="ctr">
+                <a:buNone/>
+              </a:pPr>
+              <a:r>
+                <a:rPr lang="en-US" sz="1800" b="1" dirty="0">
+                  <a:solidFill>
+                    <a:srgbClr val="14181A"/>
+                  </a:solidFill>
+                  <a:latin typeface="맑은 고딕" pitchFamily="34" charset="0"/>
+                  <a:ea typeface="맑은 고딕" pitchFamily="34" charset="-122"/>
+                  <a:cs typeface="맑은 고딕" pitchFamily="34" charset="-120"/>
+                </a:rPr>
+                <a:t>최근 7일 관측</a:t>
+              </a:r>
+              <a:endParaRPr lang="en-US" sz="1800" dirty="0"/>
+            </a:p>
+          </p:txBody>
+        </p:sp>
+        <p:sp>
+          <p:nvSpPr>
+            <p:cNvPr id="20" name="Text 17"/>
+            <p:cNvSpPr/>
+            <p:nvPr/>
+          </p:nvSpPr>
+          <p:spPr>
+            <a:xfrm>
+              <a:off x="6342736" y="5047488"/>
+              <a:ext cx="2377440" cy="256032"/>
+            </a:xfrm>
+            <a:prstGeom prst="rect">
+              <a:avLst/>
+            </a:prstGeom>
+            <a:noFill/>
+            <a:ln/>
+          </p:spPr>
+          <p:txBody>
+            <a:bodyPr wrap="square" lIns="0" tIns="0" rIns="0" bIns="0" rtlCol="0" anchor="ctr"/>
+            <a:lstStyle/>
+            <a:p>
+              <a:pPr marL="0" indent="0" algn="ctr">
+                <a:buNone/>
+              </a:pPr>
+              <a:r>
+                <a:rPr lang="en-US" sz="1250" dirty="0">
+                  <a:solidFill>
+                    <a:srgbClr val="55636A"/>
+                  </a:solidFill>
+                  <a:latin typeface="맑은 고딕" pitchFamily="34" charset="0"/>
+                  <a:ea typeface="맑은 고딕" pitchFamily="34" charset="-122"/>
+                  <a:cs typeface="맑은 고딕" pitchFamily="34" charset="-120"/>
+                </a:rPr>
+                <a:t>농촌진흥청</a:t>
+              </a:r>
+              <a:endParaRPr lang="en-US" sz="1250" dirty="0"/>
+            </a:p>
+          </p:txBody>
+        </p:sp>
+        <p:sp>
+          <p:nvSpPr>
+            <p:cNvPr id="21" name="Text 18"/>
+            <p:cNvSpPr/>
+            <p:nvPr/>
+          </p:nvSpPr>
+          <p:spPr>
+            <a:xfrm>
+              <a:off x="6342736" y="5303520"/>
+              <a:ext cx="2377440" cy="292608"/>
+            </a:xfrm>
+            <a:prstGeom prst="rect">
+              <a:avLst/>
+            </a:prstGeom>
+            <a:noFill/>
+            <a:ln/>
+          </p:spPr>
+          <p:txBody>
+            <a:bodyPr wrap="square" lIns="0" tIns="0" rIns="0" bIns="0" rtlCol="0" anchor="ctr"/>
+            <a:lstStyle/>
+            <a:p>
+              <a:pPr marL="0" indent="0" algn="ctr">
+                <a:buNone/>
+              </a:pPr>
+              <a:r>
+                <a:rPr lang="en-US" sz="1500" b="1" dirty="0">
+                  <a:solidFill>
+                    <a:srgbClr val="0B5A72"/>
+                  </a:solidFill>
+                  <a:latin typeface="맑은 고딕" pitchFamily="34" charset="0"/>
+                  <a:ea typeface="맑은 고딕" pitchFamily="34" charset="-122"/>
+                  <a:cs typeface="맑은 고딕" pitchFamily="34" charset="-120"/>
+                </a:rPr>
+                <a:t>2026-07-29~08-04</a:t>
+              </a:r>
+              <a:endParaRPr lang="en-US" sz="1500" dirty="0"/>
+            </a:p>
+          </p:txBody>
+        </p:sp>
+        <p:sp>
+          <p:nvSpPr>
+            <p:cNvPr id="22" name="Text 19"/>
+            <p:cNvSpPr/>
+            <p:nvPr/>
+          </p:nvSpPr>
+          <p:spPr>
+            <a:xfrm>
+              <a:off x="4223596" y="1481327"/>
+              <a:ext cx="3948223" cy="1022001"/>
+            </a:xfrm>
+            <a:prstGeom prst="rect">
+              <a:avLst/>
+            </a:prstGeom>
+            <a:noFill/>
+            <a:ln/>
+          </p:spPr>
+          <p:txBody>
+            <a:bodyPr wrap="square" lIns="0" tIns="0" rIns="0" bIns="0" rtlCol="0" anchor="ctr"/>
+            <a:lstStyle/>
+            <a:p>
+              <a:pPr marL="0" indent="0" algn="ctr">
+                <a:buNone/>
+              </a:pPr>
+              <a:r>
+                <a:rPr lang="en-US" sz="2400" b="1" dirty="0">
+                  <a:solidFill>
+                    <a:srgbClr val="55636A"/>
+                  </a:solidFill>
+                  <a:latin typeface="맑은 고딕" pitchFamily="34" charset="0"/>
+                  <a:ea typeface="맑은 고딕" pitchFamily="34" charset="-122"/>
+                  <a:cs typeface="맑은 고딕" pitchFamily="34" charset="-120"/>
+                </a:rPr>
+                <a:t>대관령면 85-61전 · 한 필지</a:t>
+              </a:r>
+              <a:endParaRPr lang="en-US" sz="2400" dirty="0"/>
+            </a:p>
+          </p:txBody>
+        </p:sp>
+      </p:grpSp>
       <p:sp>
         <p:nvSpPr>
           <p:cNvPr id="23" name="Text 20"/>
@@ -3086,7 +2929,7 @@
           <a:bodyPr wrap="square" lIns="0" tIns="0" rIns="0" bIns="0" rtlCol="0" anchor="ctr"/>
           <a:lstStyle/>
           <a:p>
-            <a:pPr algn="r" indent="0" marL="0">
+            <a:pPr marL="0" indent="0" algn="r">
               <a:buNone/>
             </a:pPr>
             <a:r>
@@ -3120,6 +2963,7 @@
         <a:solidFill>
           <a:srgbClr val="F7F9FA"/>
         </a:solidFill>
+        <a:effectLst/>
       </p:bgPr>
     </p:bg>
     <p:spTree>
@@ -3157,7 +3001,7 @@
           <a:bodyPr wrap="square" lIns="0" tIns="0" rIns="0" bIns="0" rtlCol="0" anchor="ctr"/>
           <a:lstStyle/>
           <a:p>
-            <a:pPr algn="r" indent="0" marL="0">
+            <a:pPr marL="0" indent="0" algn="r">
               <a:buNone/>
             </a:pPr>
             <a:r>
@@ -3196,7 +3040,7 @@
           <a:bodyPr wrap="square" lIns="0" tIns="0" rIns="0" bIns="0" rtlCol="0" anchor="t"/>
           <a:lstStyle/>
           <a:p>
-            <a:pPr indent="0" marL="0">
+            <a:pPr marL="0" indent="0">
               <a:lnSpc>
                 <a:spcPct val="118000"/>
               </a:lnSpc>
@@ -3243,6 +3087,13 @@
             <a:prstDash val="solid"/>
           </a:ln>
         </p:spPr>
+        <p:txBody>
+          <a:bodyPr/>
+          <a:lstStyle/>
+          <a:p>
+            <a:endParaRPr lang="ko-KR" altLang="en-US"/>
+          </a:p>
+        </p:txBody>
       </p:sp>
       <p:sp>
         <p:nvSpPr>
@@ -3265,7 +3116,7 @@
           <a:bodyPr wrap="square" lIns="0" tIns="0" rIns="0" bIns="0" rtlCol="0" anchor="ctr"/>
           <a:lstStyle/>
           <a:p>
-            <a:pPr algn="ctr" indent="0" marL="0">
+            <a:pPr marL="0" indent="0" algn="ctr">
               <a:buNone/>
             </a:pPr>
             <a:r>
@@ -3304,7 +3155,7 @@
           <a:bodyPr wrap="square" lIns="0" tIns="0" rIns="0" bIns="0" rtlCol="0" anchor="ctr"/>
           <a:lstStyle/>
           <a:p>
-            <a:pPr indent="0" marL="0">
+            <a:pPr marL="0" indent="0">
               <a:buNone/>
             </a:pPr>
             <a:r>
@@ -3343,7 +3194,7 @@
           <a:bodyPr wrap="square" lIns="0" tIns="0" rIns="0" bIns="0" rtlCol="0" anchor="ctr"/>
           <a:lstStyle/>
           <a:p>
-            <a:pPr algn="r" indent="0" marL="0">
+            <a:pPr marL="0" indent="0" algn="r">
               <a:buNone/>
             </a:pPr>
             <a:r>
@@ -3363,133 +3214,7 @@
       </p:sp>
       <p:pic>
         <p:nvPicPr>
-          <p:cNvPr id="8" name="Image 0" descr="D:/Projects/batboda/발표/캡처/20260805_C01_대관령85-61전_경계.png">    </p:cNvPr>
-          <p:cNvPicPr>
-            <a:picLocks noChangeAspect="1"/>
-          </p:cNvPicPr>
-          <p:nvPr/>
-        </p:nvPicPr>
-        <p:blipFill>
-          <a:blip r:embed="rId1"/>
-          <a:stretch>
-            <a:fillRect/>
-          </a:stretch>
-        </p:blipFill>
-        <p:spPr>
-          <a:xfrm>
-            <a:off x="566928" y="4069178"/>
-            <a:ext cx="2079894" cy="1170237"/>
-          </a:xfrm>
-          <a:prstGeom prst="rect">
-            <a:avLst/>
-          </a:prstGeom>
-        </p:spPr>
-      </p:pic>
-      <p:sp>
-        <p:nvSpPr>
-          <p:cNvPr id="9" name="Text 6"/>
-          <p:cNvSpPr/>
-          <p:nvPr/>
-        </p:nvSpPr>
-        <p:spPr>
-          <a:xfrm>
-            <a:off x="566928" y="5870448"/>
-            <a:ext cx="2079894" cy="274320"/>
-          </a:xfrm>
-          <a:prstGeom prst="rect">
-            <a:avLst/>
-          </a:prstGeom>
-          <a:noFill/>
-          <a:ln/>
-        </p:spPr>
-        <p:txBody>
-          <a:bodyPr wrap="square" lIns="0" tIns="0" rIns="0" bIns="0" rtlCol="0" anchor="ctr"/>
-          <a:lstStyle/>
-          <a:p>
-            <a:pPr algn="ctr" indent="0" marL="0">
-              <a:buNone/>
-            </a:pPr>
-            <a:r>
-              <a:rPr lang="en-US" sz="1250" b="1" dirty="0">
-                <a:solidFill>
-                  <a:srgbClr val="0B5A72"/>
-                </a:solidFill>
-                <a:latin typeface="맑은 고딕" pitchFamily="34" charset="0"/>
-                <a:ea typeface="맑은 고딕" pitchFamily="34" charset="-122"/>
-                <a:cs typeface="맑은 고딕" pitchFamily="34" charset="-120"/>
-              </a:rPr>
-              <a:t>농지 경계</a:t>
-            </a:r>
-            <a:endParaRPr lang="en-US" sz="1250" dirty="0"/>
-          </a:p>
-        </p:txBody>
-      </p:sp>
-      <p:pic>
-        <p:nvPicPr>
-          <p:cNvPr id="10" name="Image 1" descr="D:/Projects/batboda/발표/캡처/20260805_C02_판정서_상단.png">    </p:cNvPr>
-          <p:cNvPicPr>
-            <a:picLocks noChangeAspect="1"/>
-          </p:cNvPicPr>
-          <p:nvPr/>
-        </p:nvPicPr>
-        <p:blipFill>
-          <a:blip r:embed="rId2"/>
-          <a:stretch>
-            <a:fillRect/>
-          </a:stretch>
-        </p:blipFill>
-        <p:spPr>
-          <a:xfrm>
-            <a:off x="2811414" y="4033443"/>
-            <a:ext cx="2079894" cy="1241706"/>
-          </a:xfrm>
-          <a:prstGeom prst="rect">
-            <a:avLst/>
-          </a:prstGeom>
-        </p:spPr>
-      </p:pic>
-      <p:sp>
-        <p:nvSpPr>
-          <p:cNvPr id="11" name="Text 7"/>
-          <p:cNvSpPr/>
-          <p:nvPr/>
-        </p:nvSpPr>
-        <p:spPr>
-          <a:xfrm>
-            <a:off x="2811414" y="5870448"/>
-            <a:ext cx="2079894" cy="274320"/>
-          </a:xfrm>
-          <a:prstGeom prst="rect">
-            <a:avLst/>
-          </a:prstGeom>
-          <a:noFill/>
-          <a:ln/>
-        </p:spPr>
-        <p:txBody>
-          <a:bodyPr wrap="square" lIns="0" tIns="0" rIns="0" bIns="0" rtlCol="0" anchor="ctr"/>
-          <a:lstStyle/>
-          <a:p>
-            <a:pPr algn="ctr" indent="0" marL="0">
-              <a:buNone/>
-            </a:pPr>
-            <a:r>
-              <a:rPr lang="en-US" sz="1250" b="1" dirty="0">
-                <a:solidFill>
-                  <a:srgbClr val="0B5A72"/>
-                </a:solidFill>
-                <a:latin typeface="맑은 고딕" pitchFamily="34" charset="0"/>
-                <a:ea typeface="맑은 고딕" pitchFamily="34" charset="-122"/>
-                <a:cs typeface="맑은 고딕" pitchFamily="34" charset="-120"/>
-              </a:rPr>
-              <a:t>판정과 상태</a:t>
-            </a:r>
-            <a:endParaRPr lang="en-US" sz="1250" dirty="0"/>
-          </a:p>
-        </p:txBody>
-      </p:sp>
-      <p:pic>
-        <p:nvPicPr>
-          <p:cNvPr id="12" name="Image 2" descr="D:/Projects/batboda/발표/캡처/20260805_C03_산도_기온_눈금.png">    </p:cNvPr>
+          <p:cNvPr id="8" name="Image 0" descr="D:/Projects/batboda/발표/캡처/20260805_C01_대관령85-61전_경계.png"/>
           <p:cNvPicPr>
             <a:picLocks noChangeAspect="1"/>
           </p:cNvPicPr>
@@ -3503,8 +3228,8 @@
         </p:blipFill>
         <p:spPr>
           <a:xfrm>
-            <a:off x="5202385" y="3529584"/>
-            <a:ext cx="1786926" cy="2249424"/>
+            <a:off x="566928" y="4069178"/>
+            <a:ext cx="2079894" cy="1170237"/>
           </a:xfrm>
           <a:prstGeom prst="rect">
             <a:avLst/>
@@ -3513,13 +3238,13 @@
       </p:pic>
       <p:sp>
         <p:nvSpPr>
-          <p:cNvPr id="13" name="Text 8"/>
-          <p:cNvSpPr/>
-          <p:nvPr/>
-        </p:nvSpPr>
-        <p:spPr>
-          <a:xfrm>
-            <a:off x="5055900" y="5870448"/>
+          <p:cNvPr id="9" name="Text 6"/>
+          <p:cNvSpPr/>
+          <p:nvPr/>
+        </p:nvSpPr>
+        <p:spPr>
+          <a:xfrm>
+            <a:off x="566928" y="5870448"/>
             <a:ext cx="2079894" cy="274320"/>
           </a:xfrm>
           <a:prstGeom prst="rect">
@@ -3532,7 +3257,7 @@
           <a:bodyPr wrap="square" lIns="0" tIns="0" rIns="0" bIns="0" rtlCol="0" anchor="ctr"/>
           <a:lstStyle/>
           <a:p>
-            <a:pPr algn="ctr" indent="0" marL="0">
+            <a:pPr marL="0" indent="0" algn="ctr">
               <a:buNone/>
             </a:pPr>
             <a:r>
@@ -3544,7 +3269,7 @@
                 <a:ea typeface="맑은 고딕" pitchFamily="34" charset="-122"/>
                 <a:cs typeface="맑은 고딕" pitchFamily="34" charset="-120"/>
               </a:rPr>
-              <a:t>기준 대조</a:t>
+              <a:t>농지 경계</a:t>
             </a:r>
             <a:endParaRPr lang="en-US" sz="1250" dirty="0"/>
           </a:p>
@@ -3552,7 +3277,7 @@
       </p:sp>
       <p:pic>
         <p:nvPicPr>
-          <p:cNvPr id="14" name="Image 3" descr="D:/Projects/batboda/발표/캡처/20260805_C04_사용한자료_표.png">    </p:cNvPr>
+          <p:cNvPr id="10" name="Image 1" descr="D:/Projects/batboda/발표/캡처/20260805_C02_판정서_상단.png"/>
           <p:cNvPicPr>
             <a:picLocks noChangeAspect="1"/>
           </p:cNvPicPr>
@@ -3566,8 +3291,8 @@
         </p:blipFill>
         <p:spPr>
           <a:xfrm>
-            <a:off x="7300387" y="3884860"/>
-            <a:ext cx="2079894" cy="1538872"/>
+            <a:off x="2811414" y="4033443"/>
+            <a:ext cx="2079894" cy="1241706"/>
           </a:xfrm>
           <a:prstGeom prst="rect">
             <a:avLst/>
@@ -3576,13 +3301,13 @@
       </p:pic>
       <p:sp>
         <p:nvSpPr>
-          <p:cNvPr id="15" name="Text 9"/>
-          <p:cNvSpPr/>
-          <p:nvPr/>
-        </p:nvSpPr>
-        <p:spPr>
-          <a:xfrm>
-            <a:off x="7300387" y="5870448"/>
+          <p:cNvPr id="11" name="Text 7"/>
+          <p:cNvSpPr/>
+          <p:nvPr/>
+        </p:nvSpPr>
+        <p:spPr>
+          <a:xfrm>
+            <a:off x="2811414" y="5870448"/>
             <a:ext cx="2079894" cy="274320"/>
           </a:xfrm>
           <a:prstGeom prst="rect">
@@ -3595,7 +3320,7 @@
           <a:bodyPr wrap="square" lIns="0" tIns="0" rIns="0" bIns="0" rtlCol="0" anchor="ctr"/>
           <a:lstStyle/>
           <a:p>
-            <a:pPr algn="ctr" indent="0" marL="0">
+            <a:pPr marL="0" indent="0" algn="ctr">
               <a:buNone/>
             </a:pPr>
             <a:r>
@@ -3607,7 +3332,7 @@
                 <a:ea typeface="맑은 고딕" pitchFamily="34" charset="-122"/>
                 <a:cs typeface="맑은 고딕" pitchFamily="34" charset="-120"/>
               </a:rPr>
-              <a:t>출처 추적</a:t>
+              <a:t>판정과 상태</a:t>
             </a:r>
             <a:endParaRPr lang="en-US" sz="1250" dirty="0"/>
           </a:p>
@@ -3615,7 +3340,7 @@
       </p:sp>
       <p:pic>
         <p:nvPicPr>
-          <p:cNvPr id="16" name="Image 4" descr="D:/Projects/batboda/발표/캡처/20260805_C07_04_상단_결론과근거.png">    </p:cNvPr>
+          <p:cNvPr id="12" name="Image 2" descr="D:/Projects/batboda/발표/캡처/20260805_C03_산도_기온_눈금.png"/>
           <p:cNvPicPr>
             <a:picLocks noChangeAspect="1"/>
           </p:cNvPicPr>
@@ -3629,6 +3354,132 @@
         </p:blipFill>
         <p:spPr>
           <a:xfrm>
+            <a:off x="5202385" y="3529584"/>
+            <a:ext cx="1786926" cy="2249424"/>
+          </a:xfrm>
+          <a:prstGeom prst="rect">
+            <a:avLst/>
+          </a:prstGeom>
+        </p:spPr>
+      </p:pic>
+      <p:sp>
+        <p:nvSpPr>
+          <p:cNvPr id="13" name="Text 8"/>
+          <p:cNvSpPr/>
+          <p:nvPr/>
+        </p:nvSpPr>
+        <p:spPr>
+          <a:xfrm>
+            <a:off x="5055900" y="5870448"/>
+            <a:ext cx="2079894" cy="274320"/>
+          </a:xfrm>
+          <a:prstGeom prst="rect">
+            <a:avLst/>
+          </a:prstGeom>
+          <a:noFill/>
+          <a:ln/>
+        </p:spPr>
+        <p:txBody>
+          <a:bodyPr wrap="square" lIns="0" tIns="0" rIns="0" bIns="0" rtlCol="0" anchor="ctr"/>
+          <a:lstStyle/>
+          <a:p>
+            <a:pPr marL="0" indent="0" algn="ctr">
+              <a:buNone/>
+            </a:pPr>
+            <a:r>
+              <a:rPr lang="en-US" sz="1250" b="1" dirty="0">
+                <a:solidFill>
+                  <a:srgbClr val="0B5A72"/>
+                </a:solidFill>
+                <a:latin typeface="맑은 고딕" pitchFamily="34" charset="0"/>
+                <a:ea typeface="맑은 고딕" pitchFamily="34" charset="-122"/>
+                <a:cs typeface="맑은 고딕" pitchFamily="34" charset="-120"/>
+              </a:rPr>
+              <a:t>기준 대조</a:t>
+            </a:r>
+            <a:endParaRPr lang="en-US" sz="1250" dirty="0"/>
+          </a:p>
+        </p:txBody>
+      </p:sp>
+      <p:pic>
+        <p:nvPicPr>
+          <p:cNvPr id="14" name="Image 3" descr="D:/Projects/batboda/발표/캡처/20260805_C04_사용한자료_표.png"/>
+          <p:cNvPicPr>
+            <a:picLocks noChangeAspect="1"/>
+          </p:cNvPicPr>
+          <p:nvPr/>
+        </p:nvPicPr>
+        <p:blipFill>
+          <a:blip r:embed="rId6"/>
+          <a:stretch>
+            <a:fillRect/>
+          </a:stretch>
+        </p:blipFill>
+        <p:spPr>
+          <a:xfrm>
+            <a:off x="7300387" y="3884860"/>
+            <a:ext cx="2079894" cy="1538872"/>
+          </a:xfrm>
+          <a:prstGeom prst="rect">
+            <a:avLst/>
+          </a:prstGeom>
+        </p:spPr>
+      </p:pic>
+      <p:sp>
+        <p:nvSpPr>
+          <p:cNvPr id="15" name="Text 9"/>
+          <p:cNvSpPr/>
+          <p:nvPr/>
+        </p:nvSpPr>
+        <p:spPr>
+          <a:xfrm>
+            <a:off x="7300387" y="5870448"/>
+            <a:ext cx="2079894" cy="274320"/>
+          </a:xfrm>
+          <a:prstGeom prst="rect">
+            <a:avLst/>
+          </a:prstGeom>
+          <a:noFill/>
+          <a:ln/>
+        </p:spPr>
+        <p:txBody>
+          <a:bodyPr wrap="square" lIns="0" tIns="0" rIns="0" bIns="0" rtlCol="0" anchor="ctr"/>
+          <a:lstStyle/>
+          <a:p>
+            <a:pPr marL="0" indent="0" algn="ctr">
+              <a:buNone/>
+            </a:pPr>
+            <a:r>
+              <a:rPr lang="en-US" sz="1250" b="1" dirty="0">
+                <a:solidFill>
+                  <a:srgbClr val="0B5A72"/>
+                </a:solidFill>
+                <a:latin typeface="맑은 고딕" pitchFamily="34" charset="0"/>
+                <a:ea typeface="맑은 고딕" pitchFamily="34" charset="-122"/>
+                <a:cs typeface="맑은 고딕" pitchFamily="34" charset="-120"/>
+              </a:rPr>
+              <a:t>출처 추적</a:t>
+            </a:r>
+            <a:endParaRPr lang="en-US" sz="1250" dirty="0"/>
+          </a:p>
+        </p:txBody>
+      </p:sp>
+      <p:pic>
+        <p:nvPicPr>
+          <p:cNvPr id="16" name="Image 4" descr="D:/Projects/batboda/발표/캡처/20260805_C07_04_상단_결론과근거.png"/>
+          <p:cNvPicPr>
+            <a:picLocks noChangeAspect="1"/>
+          </p:cNvPicPr>
+          <p:nvPr/>
+        </p:nvPicPr>
+        <p:blipFill>
+          <a:blip r:embed="rId7"/>
+          <a:stretch>
+            <a:fillRect/>
+          </a:stretch>
+        </p:blipFill>
+        <p:spPr>
+          <a:xfrm>
             <a:off x="9544873" y="3842857"/>
             <a:ext cx="2079894" cy="1622877"/>
           </a:xfrm>
@@ -3658,7 +3509,7 @@
           <a:bodyPr wrap="square" lIns="0" tIns="0" rIns="0" bIns="0" rtlCol="0" anchor="ctr"/>
           <a:lstStyle/>
           <a:p>
-            <a:pPr algn="ctr" indent="0" marL="0">
+            <a:pPr marL="0" indent="0" algn="ctr">
               <a:buNone/>
             </a:pPr>
             <a:r>
@@ -3697,7 +3548,7 @@
           <a:bodyPr wrap="square" lIns="0" tIns="0" rIns="0" bIns="0" rtlCol="0" anchor="ctr"/>
           <a:lstStyle/>
           <a:p>
-            <a:pPr algn="r" indent="0" marL="0">
+            <a:pPr marL="0" indent="0" algn="r">
               <a:buNone/>
             </a:pPr>
             <a:r>
@@ -3731,6 +3582,7 @@
         <a:solidFill>
           <a:srgbClr val="F7F9FA"/>
         </a:solidFill>
+        <a:effectLst/>
       </p:bgPr>
     </p:bg>
     <p:spTree>
@@ -3768,7 +3620,7 @@
           <a:bodyPr wrap="square" lIns="0" tIns="0" rIns="0" bIns="0" rtlCol="0" anchor="ctr"/>
           <a:lstStyle/>
           <a:p>
-            <a:pPr algn="r" indent="0" marL="0">
+            <a:pPr marL="0" indent="0" algn="r">
               <a:buNone/>
             </a:pPr>
             <a:r>
@@ -3807,7 +3659,7 @@
           <a:bodyPr wrap="square" lIns="0" tIns="0" rIns="0" bIns="0" rtlCol="0" anchor="t"/>
           <a:lstStyle/>
           <a:p>
-            <a:pPr indent="0" marL="0">
+            <a:pPr marL="0" indent="0">
               <a:lnSpc>
                 <a:spcPct val="118000"/>
               </a:lnSpc>
@@ -3827,7 +3679,7 @@
             <a:endParaRPr lang="en-US" sz="2600" dirty="0"/>
           </a:p>
           <a:p>
-            <a:pPr indent="0" marL="0">
+            <a:pPr marL="0" indent="0">
               <a:lnSpc>
                 <a:spcPct val="118000"/>
               </a:lnSpc>
@@ -3850,14 +3702,14 @@
       </p:sp>
       <p:pic>
         <p:nvPicPr>
-          <p:cNvPr id="4" name="Image 0" descr="D:/Projects/batboda/발표/캡처/20260805_C07_04_상단_결론과근거.png">    </p:cNvPr>
+          <p:cNvPr id="4" name="Image 0" descr="D:/Projects/batboda/발표/캡처/20260805_C07_04_상단_결론과근거.png"/>
           <p:cNvPicPr>
             <a:picLocks noChangeAspect="1"/>
           </p:cNvPicPr>
           <p:nvPr/>
         </p:nvPicPr>
         <p:blipFill>
-          <a:blip r:embed="rId1"/>
+          <a:blip r:embed="rId3"/>
           <a:stretch>
             <a:fillRect/>
           </a:stretch>
@@ -3893,7 +3745,7 @@
           <a:bodyPr wrap="square" lIns="0" tIns="0" rIns="0" bIns="0" rtlCol="0" anchor="ctr"/>
           <a:lstStyle/>
           <a:p>
-            <a:pPr indent="0" marL="0">
+            <a:pPr marL="0" indent="0">
               <a:buNone/>
             </a:pPr>
             <a:r>
@@ -3937,6 +3789,13 @@
             <a:prstDash val="solid"/>
           </a:ln>
         </p:spPr>
+        <p:txBody>
+          <a:bodyPr/>
+          <a:lstStyle/>
+          <a:p>
+            <a:endParaRPr lang="ko-KR" altLang="en-US"/>
+          </a:p>
+        </p:txBody>
       </p:sp>
       <p:sp>
         <p:nvSpPr>
@@ -3959,7 +3818,7 @@
           <a:bodyPr wrap="square" lIns="0" tIns="0" rIns="0" bIns="0" rtlCol="0" anchor="ctr"/>
           <a:lstStyle/>
           <a:p>
-            <a:pPr indent="0" marL="0">
+            <a:pPr marL="0" indent="0">
               <a:buNone/>
             </a:pPr>
             <a:r>
@@ -3998,7 +3857,7 @@
           <a:bodyPr wrap="square" lIns="0" tIns="0" rIns="0" bIns="0" rtlCol="0" anchor="ctr"/>
           <a:lstStyle/>
           <a:p>
-            <a:pPr indent="0" marL="0">
+            <a:pPr marL="0" indent="0">
               <a:buNone/>
             </a:pPr>
             <a:r>
@@ -4042,6 +3901,13 @@
             <a:prstDash val="solid"/>
           </a:ln>
         </p:spPr>
+        <p:txBody>
+          <a:bodyPr/>
+          <a:lstStyle/>
+          <a:p>
+            <a:endParaRPr lang="ko-KR" altLang="en-US"/>
+          </a:p>
+        </p:txBody>
       </p:sp>
       <p:sp>
         <p:nvSpPr>
@@ -4064,7 +3930,7 @@
           <a:bodyPr wrap="square" lIns="0" tIns="0" rIns="0" bIns="0" rtlCol="0" anchor="ctr"/>
           <a:lstStyle/>
           <a:p>
-            <a:pPr indent="0" marL="0">
+            <a:pPr marL="0" indent="0">
               <a:buNone/>
             </a:pPr>
             <a:r>
@@ -4103,7 +3969,7 @@
           <a:bodyPr wrap="square" lIns="0" tIns="0" rIns="0" bIns="0" rtlCol="0" anchor="ctr"/>
           <a:lstStyle/>
           <a:p>
-            <a:pPr indent="0" marL="0">
+            <a:pPr marL="0" indent="0">
               <a:buNone/>
             </a:pPr>
             <a:r>
@@ -4147,6 +4013,13 @@
             <a:prstDash val="solid"/>
           </a:ln>
         </p:spPr>
+        <p:txBody>
+          <a:bodyPr/>
+          <a:lstStyle/>
+          <a:p>
+            <a:endParaRPr lang="ko-KR" altLang="en-US"/>
+          </a:p>
+        </p:txBody>
       </p:sp>
       <p:sp>
         <p:nvSpPr>
@@ -4169,7 +4042,7 @@
           <a:bodyPr wrap="square" lIns="0" tIns="0" rIns="0" bIns="0" rtlCol="0" anchor="ctr"/>
           <a:lstStyle/>
           <a:p>
-            <a:pPr indent="0" marL="0">
+            <a:pPr marL="0" indent="0">
               <a:buNone/>
             </a:pPr>
             <a:r>
@@ -4208,7 +4081,7 @@
           <a:bodyPr wrap="square" lIns="0" tIns="0" rIns="0" bIns="0" rtlCol="0" anchor="ctr"/>
           <a:lstStyle/>
           <a:p>
-            <a:pPr indent="0" marL="0">
+            <a:pPr marL="0" indent="0">
               <a:buNone/>
             </a:pPr>
             <a:r>
@@ -4252,6 +4125,13 @@
             <a:prstDash val="solid"/>
           </a:ln>
         </p:spPr>
+        <p:txBody>
+          <a:bodyPr/>
+          <a:lstStyle/>
+          <a:p>
+            <a:endParaRPr lang="ko-KR" altLang="en-US"/>
+          </a:p>
+        </p:txBody>
       </p:sp>
       <p:sp>
         <p:nvSpPr>
@@ -4274,7 +4154,7 @@
           <a:bodyPr wrap="square" lIns="0" tIns="0" rIns="0" bIns="0" rtlCol="0" anchor="ctr"/>
           <a:lstStyle/>
           <a:p>
-            <a:pPr indent="0" marL="0">
+            <a:pPr marL="0" indent="0">
               <a:buNone/>
             </a:pPr>
             <a:r>
@@ -4313,7 +4193,7 @@
           <a:bodyPr wrap="square" lIns="0" tIns="0" rIns="0" bIns="0" rtlCol="0" anchor="ctr"/>
           <a:lstStyle/>
           <a:p>
-            <a:pPr indent="0" marL="0">
+            <a:pPr marL="0" indent="0">
               <a:buNone/>
             </a:pPr>
             <a:r>
@@ -4357,6 +4237,13 @@
             <a:prstDash val="solid"/>
           </a:ln>
         </p:spPr>
+        <p:txBody>
+          <a:bodyPr/>
+          <a:lstStyle/>
+          <a:p>
+            <a:endParaRPr lang="ko-KR" altLang="en-US"/>
+          </a:p>
+        </p:txBody>
       </p:sp>
       <p:sp>
         <p:nvSpPr>
@@ -4379,7 +4266,7 @@
           <a:bodyPr wrap="square" lIns="0" tIns="0" rIns="0" bIns="0" rtlCol="0" anchor="ctr"/>
           <a:lstStyle/>
           <a:p>
-            <a:pPr indent="0" marL="0">
+            <a:pPr marL="0" indent="0">
               <a:buNone/>
             </a:pPr>
             <a:r>
@@ -4418,7 +4305,7 @@
           <a:bodyPr wrap="square" lIns="0" tIns="0" rIns="0" bIns="0" rtlCol="0" anchor="ctr"/>
           <a:lstStyle/>
           <a:p>
-            <a:pPr indent="0" marL="0">
+            <a:pPr marL="0" indent="0">
               <a:buNone/>
             </a:pPr>
             <a:r>
@@ -4457,7 +4344,7 @@
           <a:bodyPr wrap="square" lIns="0" tIns="0" rIns="0" bIns="0" rtlCol="0" anchor="ctr"/>
           <a:lstStyle/>
           <a:p>
-            <a:pPr algn="r" indent="0" marL="0">
+            <a:pPr marL="0" indent="0" algn="r">
               <a:buNone/>
             </a:pPr>
             <a:r>
@@ -4491,6 +4378,7 @@
         <a:solidFill>
           <a:srgbClr val="F7F9FA"/>
         </a:solidFill>
+        <a:effectLst/>
       </p:bgPr>
     </p:bg>
     <p:spTree>
@@ -4528,7 +4416,7 @@
           <a:bodyPr wrap="square" lIns="0" tIns="0" rIns="0" bIns="0" rtlCol="0" anchor="ctr"/>
           <a:lstStyle/>
           <a:p>
-            <a:pPr algn="r" indent="0" marL="0">
+            <a:pPr marL="0" indent="0" algn="r">
               <a:buNone/>
             </a:pPr>
             <a:r>
@@ -4567,7 +4455,7 @@
           <a:bodyPr wrap="square" lIns="0" tIns="0" rIns="0" bIns="0" rtlCol="0" anchor="t"/>
           <a:lstStyle/>
           <a:p>
-            <a:pPr indent="0" marL="0">
+            <a:pPr marL="0" indent="0">
               <a:lnSpc>
                 <a:spcPct val="118000"/>
               </a:lnSpc>
@@ -4587,7 +4475,7 @@
             <a:endParaRPr lang="en-US" sz="2800" dirty="0"/>
           </a:p>
           <a:p>
-            <a:pPr indent="0" marL="0">
+            <a:pPr marL="0" indent="0">
               <a:lnSpc>
                 <a:spcPct val="118000"/>
               </a:lnSpc>
@@ -4629,7 +4517,7 @@
           <a:bodyPr wrap="square" lIns="0" tIns="0" rIns="0" bIns="0" rtlCol="0" anchor="ctr"/>
           <a:lstStyle/>
           <a:p>
-            <a:pPr indent="0" marL="0">
+            <a:pPr marL="0" indent="0">
               <a:buNone/>
             </a:pPr>
             <a:r>
@@ -4673,6 +4561,13 @@
             <a:prstDash val="solid"/>
           </a:ln>
         </p:spPr>
+        <p:txBody>
+          <a:bodyPr/>
+          <a:lstStyle/>
+          <a:p>
+            <a:endParaRPr lang="ko-KR" altLang="en-US"/>
+          </a:p>
+        </p:txBody>
       </p:sp>
       <p:sp>
         <p:nvSpPr>
@@ -4695,7 +4590,7 @@
           <a:bodyPr wrap="square" lIns="0" tIns="0" rIns="0" bIns="0" rtlCol="0" anchor="ctr"/>
           <a:lstStyle/>
           <a:p>
-            <a:pPr indent="0" marL="0">
+            <a:pPr marL="0" indent="0">
               <a:buNone/>
             </a:pPr>
             <a:r>
@@ -4734,7 +4629,7 @@
           <a:bodyPr wrap="square" lIns="0" tIns="0" rIns="0" bIns="0" rtlCol="0" anchor="ctr"/>
           <a:lstStyle/>
           <a:p>
-            <a:pPr indent="0" marL="0">
+            <a:pPr marL="0" indent="0">
               <a:buNone/>
             </a:pPr>
             <a:r>
@@ -4778,6 +4673,13 @@
             <a:prstDash val="solid"/>
           </a:ln>
         </p:spPr>
+        <p:txBody>
+          <a:bodyPr/>
+          <a:lstStyle/>
+          <a:p>
+            <a:endParaRPr lang="ko-KR" altLang="en-US"/>
+          </a:p>
+        </p:txBody>
       </p:sp>
       <p:sp>
         <p:nvSpPr>
@@ -4800,7 +4702,7 @@
           <a:bodyPr wrap="square" lIns="0" tIns="0" rIns="0" bIns="0" rtlCol="0" anchor="ctr"/>
           <a:lstStyle/>
           <a:p>
-            <a:pPr indent="0" marL="0">
+            <a:pPr marL="0" indent="0">
               <a:buNone/>
             </a:pPr>
             <a:r>
@@ -4839,7 +4741,7 @@
           <a:bodyPr wrap="square" lIns="0" tIns="0" rIns="0" bIns="0" rtlCol="0" anchor="ctr"/>
           <a:lstStyle/>
           <a:p>
-            <a:pPr indent="0" marL="0">
+            <a:pPr marL="0" indent="0">
               <a:buNone/>
             </a:pPr>
             <a:r>
@@ -4883,6 +4785,13 @@
             <a:prstDash val="solid"/>
           </a:ln>
         </p:spPr>
+        <p:txBody>
+          <a:bodyPr/>
+          <a:lstStyle/>
+          <a:p>
+            <a:endParaRPr lang="ko-KR" altLang="en-US"/>
+          </a:p>
+        </p:txBody>
       </p:sp>
       <p:sp>
         <p:nvSpPr>
@@ -4905,7 +4814,7 @@
           <a:bodyPr wrap="square" lIns="0" tIns="0" rIns="0" bIns="0" rtlCol="0" anchor="ctr"/>
           <a:lstStyle/>
           <a:p>
-            <a:pPr indent="0" marL="0">
+            <a:pPr marL="0" indent="0">
               <a:buNone/>
             </a:pPr>
             <a:r>
@@ -4944,7 +4853,7 @@
           <a:bodyPr wrap="square" lIns="0" tIns="0" rIns="0" bIns="0" rtlCol="0" anchor="ctr"/>
           <a:lstStyle/>
           <a:p>
-            <a:pPr indent="0" marL="0">
+            <a:pPr marL="0" indent="0">
               <a:buNone/>
             </a:pPr>
             <a:r>
@@ -4964,14 +4873,14 @@
       </p:sp>
       <p:pic>
         <p:nvPicPr>
-          <p:cNvPr id="14" name="Image 0" descr="D:/Projects/batboda/발표/캡처/20260805_C04b_상태_기준시각.png">    </p:cNvPr>
+          <p:cNvPr id="14" name="Image 0" descr="D:/Projects/batboda/발표/캡처/20260805_C04b_상태_기준시각.png"/>
           <p:cNvPicPr>
             <a:picLocks noChangeAspect="1"/>
           </p:cNvPicPr>
           <p:nvPr/>
         </p:nvPicPr>
         <p:blipFill>
-          <a:blip r:embed="rId1"/>
+          <a:blip r:embed="rId3"/>
           <a:stretch>
             <a:fillRect/>
           </a:stretch>
@@ -5012,6 +4921,13 @@
             <a:prstDash val="solid"/>
           </a:ln>
         </p:spPr>
+        <p:txBody>
+          <a:bodyPr/>
+          <a:lstStyle/>
+          <a:p>
+            <a:endParaRPr lang="ko-KR" altLang="en-US"/>
+          </a:p>
+        </p:txBody>
       </p:sp>
       <p:sp>
         <p:nvSpPr>
@@ -5034,7 +4950,7 @@
           <a:bodyPr wrap="square" lIns="0" tIns="0" rIns="0" bIns="0" rtlCol="0" anchor="t"/>
           <a:lstStyle/>
           <a:p>
-            <a:pPr indent="0" marL="0">
+            <a:pPr marL="0" indent="0">
               <a:lnSpc>
                 <a:spcPct val="120000"/>
               </a:lnSpc>
@@ -5054,7 +4970,7 @@
             <a:endParaRPr lang="en-US" sz="1350" dirty="0"/>
           </a:p>
           <a:p>
-            <a:pPr indent="0" marL="0">
+            <a:pPr marL="0" indent="0">
               <a:lnSpc>
                 <a:spcPct val="120000"/>
               </a:lnSpc>
@@ -5074,7 +4990,7 @@
             <a:endParaRPr lang="en-US" sz="1350" dirty="0"/>
           </a:p>
           <a:p>
-            <a:pPr indent="0" marL="0">
+            <a:pPr marL="0" indent="0">
               <a:lnSpc>
                 <a:spcPct val="120000"/>
               </a:lnSpc>
@@ -5116,7 +5032,7 @@
           <a:bodyPr wrap="square" lIns="0" tIns="0" rIns="0" bIns="0" rtlCol="0" anchor="t"/>
           <a:lstStyle/>
           <a:p>
-            <a:pPr indent="0" marL="0">
+            <a:pPr marL="0" indent="0">
               <a:lnSpc>
                 <a:spcPct val="122000"/>
               </a:lnSpc>
@@ -5136,7 +5052,7 @@
             <a:endParaRPr lang="en-US" sz="1200" dirty="0"/>
           </a:p>
           <a:p>
-            <a:pPr indent="0" marL="0">
+            <a:pPr marL="0" indent="0">
               <a:lnSpc>
                 <a:spcPct val="122000"/>
               </a:lnSpc>
@@ -5156,7 +5072,7 @@
             <a:endParaRPr lang="en-US" sz="1200" dirty="0"/>
           </a:p>
           <a:p>
-            <a:pPr indent="0" marL="0">
+            <a:pPr marL="0" indent="0">
               <a:lnSpc>
                 <a:spcPct val="122000"/>
               </a:lnSpc>
@@ -5176,7 +5092,7 @@
             <a:endParaRPr lang="en-US" sz="1200" dirty="0"/>
           </a:p>
           <a:p>
-            <a:pPr indent="0" marL="0">
+            <a:pPr marL="0" indent="0">
               <a:lnSpc>
                 <a:spcPct val="122000"/>
               </a:lnSpc>
@@ -5218,7 +5134,7 @@
           <a:bodyPr wrap="square" lIns="0" tIns="0" rIns="0" bIns="0" rtlCol="0" anchor="t"/>
           <a:lstStyle/>
           <a:p>
-            <a:pPr indent="0" marL="0">
+            <a:pPr marL="0" indent="0">
               <a:lnSpc>
                 <a:spcPct val="125000"/>
               </a:lnSpc>
@@ -5260,7 +5176,7 @@
           <a:bodyPr wrap="square" lIns="0" tIns="0" rIns="0" bIns="0" rtlCol="0" anchor="ctr"/>
           <a:lstStyle/>
           <a:p>
-            <a:pPr algn="r" indent="0" marL="0">
+            <a:pPr marL="0" indent="0" algn="r">
               <a:buNone/>
             </a:pPr>
             <a:r>
@@ -5294,6 +5210,7 @@
         <a:solidFill>
           <a:srgbClr val="F7F9FA"/>
         </a:solidFill>
+        <a:effectLst/>
       </p:bgPr>
     </p:bg>
     <p:spTree>
@@ -5331,7 +5248,7 @@
           <a:bodyPr wrap="square" lIns="0" tIns="0" rIns="0" bIns="0" rtlCol="0" anchor="ctr"/>
           <a:lstStyle/>
           <a:p>
-            <a:pPr algn="r" indent="0" marL="0">
+            <a:pPr marL="0" indent="0" algn="r">
               <a:buNone/>
             </a:pPr>
             <a:r>
@@ -5370,7 +5287,7 @@
           <a:bodyPr wrap="square" lIns="0" tIns="0" rIns="0" bIns="0" rtlCol="0" anchor="t"/>
           <a:lstStyle/>
           <a:p>
-            <a:pPr indent="0" marL="0">
+            <a:pPr marL="0" indent="0">
               <a:lnSpc>
                 <a:spcPct val="118000"/>
               </a:lnSpc>
@@ -5412,7 +5329,7 @@
           <a:bodyPr wrap="square" lIns="0" tIns="0" rIns="0" bIns="0" rtlCol="0" anchor="ctr"/>
           <a:lstStyle/>
           <a:p>
-            <a:pPr indent="0" marL="0">
+            <a:pPr marL="0" indent="0">
               <a:buNone/>
             </a:pPr>
             <a:r>
@@ -5451,7 +5368,7 @@
           <a:bodyPr wrap="square" lIns="0" tIns="0" rIns="0" bIns="0" rtlCol="0" anchor="ctr"/>
           <a:lstStyle/>
           <a:p>
-            <a:pPr indent="0" marL="0">
+            <a:pPr marL="0" indent="0">
               <a:buNone/>
             </a:pPr>
             <a:r>
@@ -5490,7 +5407,7 @@
           <a:bodyPr wrap="square" lIns="0" tIns="0" rIns="0" bIns="0" rtlCol="0" anchor="ctr"/>
           <a:lstStyle/>
           <a:p>
-            <a:pPr indent="0" marL="0">
+            <a:pPr marL="0" indent="0">
               <a:buNone/>
             </a:pPr>
             <a:r>
@@ -5529,7 +5446,7 @@
           <a:bodyPr wrap="square" lIns="0" tIns="0" rIns="0" bIns="0" rtlCol="0" anchor="ctr"/>
           <a:lstStyle/>
           <a:p>
-            <a:pPr indent="0" marL="0">
+            <a:pPr marL="0" indent="0">
               <a:buNone/>
             </a:pPr>
             <a:r>
@@ -5568,7 +5485,7 @@
           <a:bodyPr wrap="square" lIns="0" tIns="0" rIns="0" bIns="0" rtlCol="0" anchor="ctr"/>
           <a:lstStyle/>
           <a:p>
-            <a:pPr indent="0" marL="0">
+            <a:pPr marL="0" indent="0">
               <a:buNone/>
             </a:pPr>
             <a:r>
@@ -5607,7 +5524,7 @@
           <a:bodyPr wrap="square" lIns="0" tIns="0" rIns="0" bIns="0" rtlCol="0" anchor="ctr"/>
           <a:lstStyle/>
           <a:p>
-            <a:pPr indent="0" marL="0">
+            <a:pPr marL="0" indent="0">
               <a:buNone/>
             </a:pPr>
             <a:r>
@@ -5646,7 +5563,7 @@
           <a:bodyPr wrap="square" lIns="0" tIns="0" rIns="0" bIns="0" rtlCol="0" anchor="t"/>
           <a:lstStyle/>
           <a:p>
-            <a:pPr indent="0" marL="0">
+            <a:pPr marL="0" indent="0">
               <a:lnSpc>
                 <a:spcPct val="130000"/>
               </a:lnSpc>
@@ -5669,14 +5586,14 @@
       </p:sp>
       <p:pic>
         <p:nvPicPr>
-          <p:cNvPr id="11" name="Image 0" descr="D:/Projects/batboda/발표/캡처/20260805_C09_내농지_즐겨찾기.png">    </p:cNvPr>
+          <p:cNvPr id="11" name="Image 0" descr="D:/Projects/batboda/발표/캡처/20260805_C09_내농지_즐겨찾기.png"/>
           <p:cNvPicPr>
             <a:picLocks noChangeAspect="1"/>
           </p:cNvPicPr>
           <p:nvPr/>
         </p:nvPicPr>
         <p:blipFill>
-          <a:blip r:embed="rId1"/>
+          <a:blip r:embed="rId3"/>
           <a:stretch>
             <a:fillRect/>
           </a:stretch>
@@ -5717,6 +5634,13 @@
             <a:prstDash val="solid"/>
           </a:ln>
         </p:spPr>
+        <p:txBody>
+          <a:bodyPr/>
+          <a:lstStyle/>
+          <a:p>
+            <a:endParaRPr lang="ko-KR" altLang="en-US"/>
+          </a:p>
+        </p:txBody>
       </p:sp>
       <p:sp>
         <p:nvSpPr>
@@ -5744,6 +5668,13 @@
             <a:prstDash val="solid"/>
           </a:ln>
         </p:spPr>
+        <p:txBody>
+          <a:bodyPr/>
+          <a:lstStyle/>
+          <a:p>
+            <a:endParaRPr lang="ko-KR" altLang="en-US"/>
+          </a:p>
+        </p:txBody>
       </p:sp>
       <p:sp>
         <p:nvSpPr>
@@ -5766,7 +5697,7 @@
           <a:bodyPr wrap="square" lIns="0" tIns="0" rIns="0" bIns="0" rtlCol="0" anchor="ctr"/>
           <a:lstStyle/>
           <a:p>
-            <a:pPr algn="ctr" indent="0" marL="0">
+            <a:pPr marL="0" indent="0" algn="ctr">
               <a:buNone/>
             </a:pPr>
             <a:r>
@@ -5805,7 +5736,7 @@
           <a:bodyPr wrap="square" lIns="0" tIns="0" rIns="0" bIns="0" rtlCol="0" anchor="t"/>
           <a:lstStyle/>
           <a:p>
-            <a:pPr indent="0" marL="0">
+            <a:pPr marL="0" indent="0">
               <a:lnSpc>
                 <a:spcPct val="130000"/>
               </a:lnSpc>
@@ -5847,7 +5778,7 @@
           <a:bodyPr wrap="square" lIns="0" tIns="0" rIns="0" bIns="0" rtlCol="0" anchor="ctr"/>
           <a:lstStyle/>
           <a:p>
-            <a:pPr algn="r" indent="0" marL="0">
+            <a:pPr marL="0" indent="0" algn="r">
               <a:buNone/>
             </a:pPr>
             <a:r>
@@ -5881,6 +5812,7 @@
         <a:solidFill>
           <a:srgbClr val="F7F9FA"/>
         </a:solidFill>
+        <a:effectLst/>
       </p:bgPr>
     </p:bg>
     <p:spTree>
@@ -5918,7 +5850,7 @@
           <a:bodyPr wrap="square" lIns="0" tIns="0" rIns="0" bIns="0" rtlCol="0" anchor="ctr"/>
           <a:lstStyle/>
           <a:p>
-            <a:pPr algn="r" indent="0" marL="0">
+            <a:pPr marL="0" indent="0" algn="r">
               <a:buNone/>
             </a:pPr>
             <a:r>
@@ -5957,7 +5889,7 @@
           <a:bodyPr wrap="square" lIns="0" tIns="0" rIns="0" bIns="0" rtlCol="0" anchor="t"/>
           <a:lstStyle/>
           <a:p>
-            <a:pPr indent="0" marL="0">
+            <a:pPr marL="0" indent="0">
               <a:lnSpc>
                 <a:spcPct val="118000"/>
               </a:lnSpc>
@@ -6004,6 +5936,13 @@
             <a:prstDash val="solid"/>
           </a:ln>
         </p:spPr>
+        <p:txBody>
+          <a:bodyPr/>
+          <a:lstStyle/>
+          <a:p>
+            <a:endParaRPr lang="ko-KR" altLang="en-US"/>
+          </a:p>
+        </p:txBody>
       </p:sp>
       <p:sp>
         <p:nvSpPr>
@@ -6026,7 +5965,7 @@
           <a:bodyPr wrap="square" lIns="0" tIns="0" rIns="0" bIns="0" rtlCol="0" anchor="ctr"/>
           <a:lstStyle/>
           <a:p>
-            <a:pPr indent="0" marL="0">
+            <a:pPr marL="0" indent="0">
               <a:buNone/>
             </a:pPr>
             <a:r>
@@ -6065,7 +6004,7 @@
           <a:bodyPr wrap="square" lIns="0" tIns="0" rIns="0" bIns="0" rtlCol="0" anchor="ctr"/>
           <a:lstStyle/>
           <a:p>
-            <a:pPr indent="0" marL="0">
+            <a:pPr marL="0" indent="0">
               <a:buNone/>
             </a:pPr>
             <a:r>
@@ -6104,7 +6043,7 @@
           <a:bodyPr wrap="square" lIns="0" tIns="0" rIns="0" bIns="0" rtlCol="0" anchor="ctr"/>
           <a:lstStyle/>
           <a:p>
-            <a:pPr indent="0" marL="0">
+            <a:pPr marL="0" indent="0">
               <a:buNone/>
             </a:pPr>
             <a:r>
@@ -6148,6 +6087,13 @@
             <a:prstDash val="solid"/>
           </a:ln>
         </p:spPr>
+        <p:txBody>
+          <a:bodyPr/>
+          <a:lstStyle/>
+          <a:p>
+            <a:endParaRPr lang="ko-KR" altLang="en-US"/>
+          </a:p>
+        </p:txBody>
       </p:sp>
       <p:sp>
         <p:nvSpPr>
@@ -6170,7 +6116,7 @@
           <a:bodyPr wrap="square" lIns="0" tIns="0" rIns="0" bIns="0" rtlCol="0" anchor="ctr"/>
           <a:lstStyle/>
           <a:p>
-            <a:pPr indent="0" marL="0">
+            <a:pPr marL="0" indent="0">
               <a:buNone/>
             </a:pPr>
             <a:r>
@@ -6209,7 +6155,7 @@
           <a:bodyPr wrap="square" lIns="0" tIns="0" rIns="0" bIns="0" rtlCol="0" anchor="ctr"/>
           <a:lstStyle/>
           <a:p>
-            <a:pPr indent="0" marL="0">
+            <a:pPr marL="0" indent="0">
               <a:buNone/>
             </a:pPr>
             <a:r>
@@ -6248,7 +6194,7 @@
           <a:bodyPr wrap="square" lIns="0" tIns="0" rIns="0" bIns="0" rtlCol="0" anchor="ctr"/>
           <a:lstStyle/>
           <a:p>
-            <a:pPr indent="0" marL="0">
+            <a:pPr marL="0" indent="0">
               <a:buNone/>
             </a:pPr>
             <a:r>
@@ -6292,6 +6238,13 @@
             <a:prstDash val="solid"/>
           </a:ln>
         </p:spPr>
+        <p:txBody>
+          <a:bodyPr/>
+          <a:lstStyle/>
+          <a:p>
+            <a:endParaRPr lang="ko-KR" altLang="en-US"/>
+          </a:p>
+        </p:txBody>
       </p:sp>
       <p:sp>
         <p:nvSpPr>
@@ -6314,7 +6267,7 @@
           <a:bodyPr wrap="square" lIns="0" tIns="0" rIns="0" bIns="0" rtlCol="0" anchor="ctr"/>
           <a:lstStyle/>
           <a:p>
-            <a:pPr indent="0" marL="0">
+            <a:pPr marL="0" indent="0">
               <a:buNone/>
             </a:pPr>
             <a:r>
@@ -6353,7 +6306,7 @@
           <a:bodyPr wrap="square" lIns="0" tIns="0" rIns="0" bIns="0" rtlCol="0" anchor="ctr"/>
           <a:lstStyle/>
           <a:p>
-            <a:pPr indent="0" marL="0">
+            <a:pPr marL="0" indent="0">
               <a:buNone/>
             </a:pPr>
             <a:r>
@@ -6392,7 +6345,7 @@
           <a:bodyPr wrap="square" lIns="0" tIns="0" rIns="0" bIns="0" rtlCol="0" anchor="ctr"/>
           <a:lstStyle/>
           <a:p>
-            <a:pPr indent="0" marL="0">
+            <a:pPr marL="0" indent="0">
               <a:buNone/>
             </a:pPr>
             <a:r>
@@ -6431,7 +6384,7 @@
           <a:bodyPr wrap="square" lIns="0" tIns="0" rIns="0" bIns="0" rtlCol="0" anchor="ctr"/>
           <a:lstStyle/>
           <a:p>
-            <a:pPr indent="0" marL="0">
+            <a:pPr marL="0" indent="0">
               <a:buNone/>
             </a:pPr>
             <a:r>
@@ -6451,14 +6404,14 @@
       </p:sp>
       <p:pic>
         <p:nvPicPr>
-          <p:cNvPr id="17" name="Image 0" descr="D:/Projects/batboda/발표/캡처/20260805_C10_최근관측_관측소거리.png">    </p:cNvPr>
+          <p:cNvPr id="17" name="Image 0" descr="D:/Projects/batboda/발표/캡처/20260805_C10_최근관측_관측소거리.png"/>
           <p:cNvPicPr>
             <a:picLocks noChangeAspect="1"/>
           </p:cNvPicPr>
           <p:nvPr/>
         </p:nvPicPr>
         <p:blipFill>
-          <a:blip r:embed="rId1"/>
+          <a:blip r:embed="rId3"/>
           <a:stretch>
             <a:fillRect/>
           </a:stretch>
@@ -6475,14 +6428,14 @@
       </p:pic>
       <p:pic>
         <p:nvPicPr>
-          <p:cNvPr id="18" name="Image 1" descr="D:/Projects/batboda/발표/캡처/20260805_C11_현재판정방식.png">    </p:cNvPr>
+          <p:cNvPr id="18" name="Image 1" descr="D:/Projects/batboda/발표/캡처/20260805_C11_현재판정방식.png"/>
           <p:cNvPicPr>
             <a:picLocks noChangeAspect="1"/>
           </p:cNvPicPr>
           <p:nvPr/>
         </p:nvPicPr>
         <p:blipFill>
-          <a:blip r:embed="rId2"/>
+          <a:blip r:embed="rId4"/>
           <a:stretch>
             <a:fillRect/>
           </a:stretch>
@@ -6518,7 +6471,7 @@
           <a:bodyPr wrap="square" lIns="0" tIns="0" rIns="0" bIns="0" rtlCol="0" anchor="ctr"/>
           <a:lstStyle/>
           <a:p>
-            <a:pPr algn="r" indent="0" marL="0">
+            <a:pPr marL="0" indent="0" algn="r">
               <a:buNone/>
             </a:pPr>
             <a:r>
@@ -6552,6 +6505,7 @@
         <a:solidFill>
           <a:srgbClr val="10262E"/>
         </a:solidFill>
+        <a:effectLst/>
       </p:bgPr>
     </p:bg>
     <p:spTree>
@@ -6589,7 +6543,7 @@
           <a:bodyPr wrap="square" lIns="0" tIns="0" rIns="0" bIns="0" rtlCol="0" anchor="t"/>
           <a:lstStyle/>
           <a:p>
-            <a:pPr indent="0" marL="0">
+            <a:pPr marL="0" indent="0">
               <a:lnSpc>
                 <a:spcPct val="116000"/>
               </a:lnSpc>
@@ -6609,7 +6563,7 @@
             <a:endParaRPr lang="en-US" sz="3100" dirty="0"/>
           </a:p>
           <a:p>
-            <a:pPr indent="0" marL="0">
+            <a:pPr marL="0" indent="0">
               <a:lnSpc>
                 <a:spcPct val="116000"/>
               </a:lnSpc>
@@ -6656,6 +6610,13 @@
             <a:prstDash val="solid"/>
           </a:ln>
         </p:spPr>
+        <p:txBody>
+          <a:bodyPr/>
+          <a:lstStyle/>
+          <a:p>
+            <a:endParaRPr lang="ko-KR" altLang="en-US"/>
+          </a:p>
+        </p:txBody>
       </p:sp>
       <p:sp>
         <p:nvSpPr>
@@ -6678,7 +6639,7 @@
           <a:bodyPr wrap="square" lIns="0" tIns="0" rIns="0" bIns="0" rtlCol="0" anchor="ctr"/>
           <a:lstStyle/>
           <a:p>
-            <a:pPr algn="ctr" indent="0" marL="0">
+            <a:pPr marL="0" indent="0" algn="ctr">
               <a:buNone/>
             </a:pPr>
             <a:r>
@@ -6717,7 +6678,7 @@
           <a:bodyPr wrap="square" lIns="0" tIns="0" rIns="0" bIns="0" rtlCol="0" anchor="ctr"/>
           <a:lstStyle/>
           <a:p>
-            <a:pPr indent="0" marL="0">
+            <a:pPr marL="0" indent="0">
               <a:buNone/>
             </a:pPr>
             <a:r>
@@ -6756,7 +6717,7 @@
           <a:bodyPr wrap="square" lIns="0" tIns="0" rIns="0" bIns="0" rtlCol="0" anchor="ctr"/>
           <a:lstStyle/>
           <a:p>
-            <a:pPr indent="0" marL="0">
+            <a:pPr marL="0" indent="0">
               <a:buNone/>
             </a:pPr>
             <a:r>
@@ -6776,14 +6737,14 @@
       </p:sp>
       <p:pic>
         <p:nvPicPr>
-          <p:cNvPr id="7" name="Image 0" descr="D:/Projects/batboda/발표/캡처/20260805_C12_QR.png">    </p:cNvPr>
+          <p:cNvPr id="7" name="Image 0" descr="D:/Projects/batboda/발표/캡처/20260805_C12_QR.png"/>
           <p:cNvPicPr>
             <a:picLocks noChangeAspect="1"/>
           </p:cNvPicPr>
           <p:nvPr/>
         </p:nvPicPr>
         <p:blipFill>
-          <a:blip r:embed="rId1"/>
+          <a:blip r:embed="rId3"/>
           <a:stretch>
             <a:fillRect/>
           </a:stretch>
@@ -6800,14 +6761,14 @@
       </p:pic>
       <p:pic>
         <p:nvPicPr>
-          <p:cNvPr id="8" name="Image 1" descr="D:/Projects/batboda/발표/캡처/20260805_C01_대관령85-61전_경계.png">    </p:cNvPr>
+          <p:cNvPr id="8" name="Image 1" descr="D:/Projects/batboda/발표/캡처/20260805_C01_대관령85-61전_경계.png"/>
           <p:cNvPicPr>
             <a:picLocks noChangeAspect="1"/>
           </p:cNvPicPr>
           <p:nvPr/>
         </p:nvPicPr>
         <p:blipFill>
-          <a:blip r:embed="rId2"/>
+          <a:blip r:embed="rId4"/>
           <a:stretch>
             <a:fillRect/>
           </a:stretch>
@@ -6843,7 +6804,7 @@
           <a:bodyPr wrap="square" lIns="0" tIns="0" rIns="0" bIns="0" rtlCol="0" anchor="ctr"/>
           <a:lstStyle/>
           <a:p>
-            <a:pPr algn="r" indent="0" marL="0">
+            <a:pPr marL="0" indent="0" algn="r">
               <a:buNone/>
             </a:pPr>
             <a:r>
@@ -7162,4 +7123,319 @@
     </a:ext>
   </a:extLst>
 </a:theme>
+</file>
+
+<file path=ppt/theme/theme2.xml><?xml version="1.0" encoding="utf-8"?>
+<a:theme xmlns:a="http://schemas.openxmlformats.org/drawingml/2006/main" name="Office 테마">
+  <a:themeElements>
+    <a:clrScheme name="Office">
+      <a:dk1>
+        <a:sysClr val="windowText" lastClr="000000"/>
+      </a:dk1>
+      <a:lt1>
+        <a:sysClr val="window" lastClr="FFFFFF"/>
+      </a:lt1>
+      <a:dk2>
+        <a:srgbClr val="0E2841"/>
+      </a:dk2>
+      <a:lt2>
+        <a:srgbClr val="E8E8E8"/>
+      </a:lt2>
+      <a:accent1>
+        <a:srgbClr val="156082"/>
+      </a:accent1>
+      <a:accent2>
+        <a:srgbClr val="E97132"/>
+      </a:accent2>
+      <a:accent3>
+        <a:srgbClr val="196B24"/>
+      </a:accent3>
+      <a:accent4>
+        <a:srgbClr val="0F9ED5"/>
+      </a:accent4>
+      <a:accent5>
+        <a:srgbClr val="A02B93"/>
+      </a:accent5>
+      <a:accent6>
+        <a:srgbClr val="4EA72E"/>
+      </a:accent6>
+      <a:hlink>
+        <a:srgbClr val="467886"/>
+      </a:hlink>
+      <a:folHlink>
+        <a:srgbClr val="96607D"/>
+      </a:folHlink>
+    </a:clrScheme>
+    <a:fontScheme name="Office">
+      <a:majorFont>
+        <a:latin typeface="맑은 고딕" panose="02110004020202020204"/>
+        <a:ea typeface=""/>
+        <a:cs typeface=""/>
+        <a:font script="Jpan" typeface="游ゴシック Light"/>
+        <a:font script="Hang" typeface="맑은 고딕"/>
+        <a:font script="Hans" typeface="等线 Light"/>
+        <a:font script="Hant" typeface="新細明體"/>
+        <a:font script="Arab" typeface="Times New Roman"/>
+        <a:font script="Hebr" typeface="Times New Roman"/>
+        <a:font script="Thai" typeface="Angsana New"/>
+        <a:font script="Ethi" typeface="Nyala"/>
+        <a:font script="Beng" typeface="Vrinda"/>
+        <a:font script="Gujr" typeface="Shruti"/>
+        <a:font script="Khmr" typeface="MoolBoran"/>
+        <a:font script="Knda" typeface="Tunga"/>
+        <a:font script="Guru" typeface="Raavi"/>
+        <a:font script="Cans" typeface="Euphemia"/>
+        <a:font script="Cher" typeface="Plantagenet Cherokee"/>
+        <a:font script="Yiii" typeface="Microsoft Yi Baiti"/>
+        <a:font script="Tibt" typeface="Microsoft Himalaya"/>
+        <a:font script="Thaa" typeface="MV Boli"/>
+        <a:font script="Deva" typeface="Mangal"/>
+        <a:font script="Telu" typeface="Gautami"/>
+        <a:font script="Taml" typeface="Latha"/>
+        <a:font script="Syrc" typeface="Estrangelo Edessa"/>
+        <a:font script="Orya" typeface="Kalinga"/>
+        <a:font script="Mlym" typeface="Kartika"/>
+        <a:font script="Laoo" typeface="DokChampa"/>
+        <a:font script="Sinh" typeface="Iskoola Pota"/>
+        <a:font script="Mong" typeface="Mongolian Baiti"/>
+        <a:font script="Viet" typeface="Times New Roman"/>
+        <a:font script="Uigh" typeface="Microsoft Uighur"/>
+        <a:font script="Geor" typeface="Sylfaen"/>
+        <a:font script="Armn" typeface="Arial"/>
+        <a:font script="Bugi" typeface="Leelawadee UI"/>
+        <a:font script="Bopo" typeface="Microsoft JhengHei"/>
+        <a:font script="Java" typeface="Javanese Text"/>
+        <a:font script="Lisu" typeface="Segoe UI"/>
+        <a:font script="Mymr" typeface="Myanmar Text"/>
+        <a:font script="Nkoo" typeface="Ebrima"/>
+        <a:font script="Olck" typeface="Nirmala UI"/>
+        <a:font script="Osma" typeface="Ebrima"/>
+        <a:font script="Phag" typeface="Phagspa"/>
+        <a:font script="Syrn" typeface="Estrangelo Edessa"/>
+        <a:font script="Syrj" typeface="Estrangelo Edessa"/>
+        <a:font script="Syre" typeface="Estrangelo Edessa"/>
+        <a:font script="Sora" typeface="Nirmala UI"/>
+        <a:font script="Tale" typeface="Microsoft Tai Le"/>
+        <a:font script="Talu" typeface="Microsoft New Tai Lue"/>
+        <a:font script="Tfng" typeface="Ebrima"/>
+      </a:majorFont>
+      <a:minorFont>
+        <a:latin typeface="맑은 고딕" panose="02110004020202020204"/>
+        <a:ea typeface=""/>
+        <a:cs typeface=""/>
+        <a:font script="Jpan" typeface="游ゴシック"/>
+        <a:font script="Hang" typeface="맑은 고딕"/>
+        <a:font script="Hans" typeface="等线"/>
+        <a:font script="Hant" typeface="新細明體"/>
+        <a:font script="Arab" typeface="Arial"/>
+        <a:font script="Hebr" typeface="Arial"/>
+        <a:font script="Thai" typeface="Cordia New"/>
+        <a:font script="Ethi" typeface="Nyala"/>
+        <a:font script="Beng" typeface="Vrinda"/>
+        <a:font script="Gujr" typeface="Shruti"/>
+        <a:font script="Khmr" typeface="DaunPenh"/>
+        <a:font script="Knda" typeface="Tunga"/>
+        <a:font script="Guru" typeface="Raavi"/>
+        <a:font script="Cans" typeface="Euphemia"/>
+        <a:font script="Cher" typeface="Plantagenet Cherokee"/>
+        <a:font script="Yiii" typeface="Microsoft Yi Baiti"/>
+        <a:font script="Tibt" typeface="Microsoft Himalaya"/>
+        <a:font script="Thaa" typeface="MV Boli"/>
+        <a:font script="Deva" typeface="Mangal"/>
+        <a:font script="Telu" typeface="Gautami"/>
+        <a:font script="Taml" typeface="Latha"/>
+        <a:font script="Syrc" typeface="Estrangelo Edessa"/>
+        <a:font script="Orya" typeface="Kalinga"/>
+        <a:font script="Mlym" typeface="Kartika"/>
+        <a:font script="Laoo" typeface="DokChampa"/>
+        <a:font script="Sinh" typeface="Iskoola Pota"/>
+        <a:font script="Mong" typeface="Mongolian Baiti"/>
+        <a:font script="Viet" typeface="Arial"/>
+        <a:font script="Uigh" typeface="Microsoft Uighur"/>
+        <a:font script="Geor" typeface="Sylfaen"/>
+        <a:font script="Armn" typeface="Arial"/>
+        <a:font script="Bugi" typeface="Leelawadee UI"/>
+        <a:font script="Bopo" typeface="Microsoft JhengHei"/>
+        <a:font script="Java" typeface="Javanese Text"/>
+        <a:font script="Lisu" typeface="Segoe UI"/>
+        <a:font script="Mymr" typeface="Myanmar Text"/>
+        <a:font script="Nkoo" typeface="Ebrima"/>
+        <a:font script="Olck" typeface="Nirmala UI"/>
+        <a:font script="Osma" typeface="Ebrima"/>
+        <a:font script="Phag" typeface="Phagspa"/>
+        <a:font script="Syrn" typeface="Estrangelo Edessa"/>
+        <a:font script="Syrj" typeface="Estrangelo Edessa"/>
+        <a:font script="Syre" typeface="Estrangelo Edessa"/>
+        <a:font script="Sora" typeface="Nirmala UI"/>
+        <a:font script="Tale" typeface="Microsoft Tai Le"/>
+        <a:font script="Talu" typeface="Microsoft New Tai Lue"/>
+        <a:font script="Tfng" typeface="Ebrima"/>
+      </a:minorFont>
+    </a:fontScheme>
+    <a:fmtScheme name="Office">
+      <a:fillStyleLst>
+        <a:solidFill>
+          <a:schemeClr val="phClr"/>
+        </a:solidFill>
+        <a:gradFill rotWithShape="1">
+          <a:gsLst>
+            <a:gs pos="0">
+              <a:schemeClr val="phClr">
+                <a:lumMod val="110000"/>
+                <a:satMod val="105000"/>
+                <a:tint val="67000"/>
+              </a:schemeClr>
+            </a:gs>
+            <a:gs pos="50000">
+              <a:schemeClr val="phClr">
+                <a:lumMod val="105000"/>
+                <a:satMod val="103000"/>
+                <a:tint val="73000"/>
+              </a:schemeClr>
+            </a:gs>
+            <a:gs pos="100000">
+              <a:schemeClr val="phClr">
+                <a:lumMod val="105000"/>
+                <a:satMod val="109000"/>
+                <a:tint val="81000"/>
+              </a:schemeClr>
+            </a:gs>
+          </a:gsLst>
+          <a:lin ang="5400000" scaled="0"/>
+        </a:gradFill>
+        <a:gradFill rotWithShape="1">
+          <a:gsLst>
+            <a:gs pos="0">
+              <a:schemeClr val="phClr">
+                <a:satMod val="103000"/>
+                <a:lumMod val="102000"/>
+                <a:tint val="94000"/>
+              </a:schemeClr>
+            </a:gs>
+            <a:gs pos="50000">
+              <a:schemeClr val="phClr">
+                <a:satMod val="110000"/>
+                <a:lumMod val="100000"/>
+                <a:shade val="100000"/>
+              </a:schemeClr>
+            </a:gs>
+            <a:gs pos="100000">
+              <a:schemeClr val="phClr">
+                <a:lumMod val="99000"/>
+                <a:satMod val="120000"/>
+                <a:shade val="78000"/>
+              </a:schemeClr>
+            </a:gs>
+          </a:gsLst>
+          <a:lin ang="5400000" scaled="0"/>
+        </a:gradFill>
+      </a:fillStyleLst>
+      <a:lnStyleLst>
+        <a:ln w="12700" cap="flat" cmpd="sng" algn="ctr">
+          <a:solidFill>
+            <a:schemeClr val="phClr"/>
+          </a:solidFill>
+          <a:prstDash val="solid"/>
+          <a:miter lim="800000"/>
+        </a:ln>
+        <a:ln w="19050" cap="flat" cmpd="sng" algn="ctr">
+          <a:solidFill>
+            <a:schemeClr val="phClr"/>
+          </a:solidFill>
+          <a:prstDash val="solid"/>
+          <a:miter lim="800000"/>
+        </a:ln>
+        <a:ln w="25400" cap="flat" cmpd="sng" algn="ctr">
+          <a:solidFill>
+            <a:schemeClr val="phClr"/>
+          </a:solidFill>
+          <a:prstDash val="solid"/>
+          <a:miter lim="800000"/>
+        </a:ln>
+      </a:lnStyleLst>
+      <a:effectStyleLst>
+        <a:effectStyle>
+          <a:effectLst/>
+        </a:effectStyle>
+        <a:effectStyle>
+          <a:effectLst/>
+        </a:effectStyle>
+        <a:effectStyle>
+          <a:effectLst>
+            <a:outerShdw blurRad="57150" dist="19050" dir="5400000" algn="ctr" rotWithShape="0">
+              <a:srgbClr val="000000">
+                <a:alpha val="63000"/>
+              </a:srgbClr>
+            </a:outerShdw>
+          </a:effectLst>
+        </a:effectStyle>
+      </a:effectStyleLst>
+      <a:bgFillStyleLst>
+        <a:solidFill>
+          <a:schemeClr val="phClr"/>
+        </a:solidFill>
+        <a:solidFill>
+          <a:schemeClr val="phClr">
+            <a:tint val="95000"/>
+            <a:satMod val="170000"/>
+          </a:schemeClr>
+        </a:solidFill>
+        <a:gradFill rotWithShape="1">
+          <a:gsLst>
+            <a:gs pos="0">
+              <a:schemeClr val="phClr">
+                <a:tint val="93000"/>
+                <a:satMod val="150000"/>
+                <a:shade val="98000"/>
+                <a:lumMod val="102000"/>
+              </a:schemeClr>
+            </a:gs>
+            <a:gs pos="50000">
+              <a:schemeClr val="phClr">
+                <a:tint val="98000"/>
+                <a:satMod val="130000"/>
+                <a:shade val="90000"/>
+                <a:lumMod val="103000"/>
+              </a:schemeClr>
+            </a:gs>
+            <a:gs pos="100000">
+              <a:schemeClr val="phClr">
+                <a:shade val="63000"/>
+                <a:satMod val="120000"/>
+              </a:schemeClr>
+            </a:gs>
+          </a:gsLst>
+          <a:lin ang="5400000" scaled="0"/>
+        </a:gradFill>
+      </a:bgFillStyleLst>
+    </a:fmtScheme>
+  </a:themeElements>
+  <a:objectDefaults>
+    <a:lnDef>
+      <a:spPr/>
+      <a:bodyPr/>
+      <a:lstStyle/>
+      <a:style>
+        <a:lnRef idx="2">
+          <a:schemeClr val="accent1"/>
+        </a:lnRef>
+        <a:fillRef idx="0">
+          <a:schemeClr val="accent1"/>
+        </a:fillRef>
+        <a:effectRef idx="1">
+          <a:schemeClr val="accent1"/>
+        </a:effectRef>
+        <a:fontRef idx="minor">
+          <a:schemeClr val="tx1"/>
+        </a:fontRef>
+      </a:style>
+    </a:lnDef>
+  </a:objectDefaults>
+  <a:extraClrSchemeLst/>
+  <a:extLst>
+    <a:ext uri="{05A4C25C-085E-4340-85A3-A5531E510DB2}">
+      <thm15:themeFamily xmlns:thm15="http://schemas.microsoft.com/office/thememl/2012/main" name="Office Theme" id="{2E142A2C-CD16-42D6-873A-C26D2A0506FA}" vid="{1BDDFF52-6CD6-40A5-AB3C-68EB2F1E4D0A}"/>
+    </a:ext>
+  </a:extLst>
+</a:theme>
 </file>